--- a/AGRI-SEN_Presentation.pptx
+++ b/AGRI-SEN_Presentation.pptx
@@ -21,6 +21,9 @@
     <p:sldId id="269" r:id="rId20"/>
     <p:sldId id="270" r:id="rId21"/>
     <p:sldId id="271" r:id="rId22"/>
+    <p:sldId id="272" r:id="rId23"/>
+    <p:sldId id="273" r:id="rId24"/>
+    <p:sldId id="274" r:id="rId25"/>
   </p:sldIdLst>
   <p:sldSz cx="9144000" cy="6858000" type="screen4x3"/>
   <p:notesSz cx="6858000" cy="9144000"/>
@@ -3215,7 +3218,7 @@
         </p:nvSpPr>
         <p:spPr>
           <a:xfrm>
-            <a:off x="457200" y="457200"/>
+            <a:off x="457200" y="365760"/>
             <a:ext cx="8229600" cy="731520"/>
           </a:xfrm>
           <a:prstGeom prst="rect">
@@ -3237,7 +3240,7 @@
               </a:defRPr>
             </a:pPr>
             <a:r>
-              <a:t>Produits Autorisés</a:t>
+              <a:t>Flux d'Exécution du Programme</a:t>
             </a:r>
           </a:p>
         </p:txBody>
@@ -3250,8 +3253,8 @@
         </p:nvSpPr>
         <p:spPr>
           <a:xfrm>
-            <a:off x="914400" y="1371600"/>
-            <a:ext cx="7315200" cy="5029200"/>
+            <a:off x="640080" y="1280160"/>
+            <a:ext cx="7863840" cy="5212080"/>
           </a:xfrm>
           <a:prstGeom prst="rect">
             <a:avLst/>
@@ -3265,74 +3268,218 @@
           <a:lstStyle/>
           <a:p>
             <a:pPr>
-              <a:spcBef>
-                <a:spcPts val="800"/>
-              </a:spcBef>
-              <a:spcAft>
-                <a:spcPts val="800"/>
-              </a:spcAft>
-              <a:defRPr sz="2000">
-                <a:solidFill>
-                  <a:srgbClr val="000000"/>
-                </a:solidFill>
-              </a:defRPr>
-            </a:pPr>
-            <a:r>
-              <a:t>🌾 Mil</a:t>
-            </a:r>
-          </a:p>
-          <a:p>
-            <a:pPr>
-              <a:spcBef>
-                <a:spcPts val="800"/>
-              </a:spcBef>
-              <a:spcAft>
-                <a:spcPts val="800"/>
-              </a:spcAft>
-              <a:defRPr sz="2000">
-                <a:solidFill>
-                  <a:srgbClr val="000000"/>
-                </a:solidFill>
-              </a:defRPr>
-            </a:pPr>
-            <a:r>
-              <a:t>🌽 Maïs</a:t>
-            </a:r>
-          </a:p>
-          <a:p>
-            <a:pPr>
-              <a:spcBef>
-                <a:spcPts val="800"/>
-              </a:spcBef>
-              <a:spcAft>
-                <a:spcPts val="800"/>
-              </a:spcAft>
-              <a:defRPr sz="2000">
-                <a:solidFill>
-                  <a:srgbClr val="000000"/>
-                </a:solidFill>
-              </a:defRPr>
-            </a:pPr>
-            <a:r>
-              <a:t>🍚 Riz</a:t>
-            </a:r>
-          </a:p>
-          <a:p>
-            <a:pPr>
-              <a:spcBef>
-                <a:spcPts val="800"/>
-              </a:spcBef>
-              <a:spcAft>
-                <a:spcPts val="800"/>
-              </a:spcAft>
-              <a:defRPr sz="2000">
-                <a:solidFill>
-                  <a:srgbClr val="000000"/>
-                </a:solidFill>
-              </a:defRPr>
-            </a:pPr>
-            <a:r>
-              <a:t>🥜 Arachide</a:t>
+              <a:lnSpc>
+                <a:spcPct val="115000"/>
+              </a:lnSpc>
+              <a:spcBef>
+                <a:spcPts val="400"/>
+              </a:spcBef>
+              <a:spcAft>
+                <a:spcPts val="400"/>
+              </a:spcAft>
+              <a:defRPr sz="1800">
+                <a:solidFill>
+                  <a:srgbClr val="000000"/>
+                </a:solidFill>
+              </a:defRPr>
+            </a:pPr>
+            <a:r>
+              <a:t>Étape 1 : L'utilisateur lance le programme avec la commande 'python main.py'</a:t>
+            </a:r>
+          </a:p>
+          <a:p>
+            <a:pPr>
+              <a:lnSpc>
+                <a:spcPct val="115000"/>
+              </a:lnSpc>
+              <a:spcBef>
+                <a:spcPts val="400"/>
+              </a:spcBef>
+              <a:spcAft>
+                <a:spcPts val="400"/>
+              </a:spcAft>
+              <a:defRPr sz="1800">
+                <a:solidFill>
+                  <a:srgbClr val="000000"/>
+                </a:solidFill>
+              </a:defRPr>
+            </a:pPr>
+          </a:p>
+          <a:p>
+            <a:pPr>
+              <a:lnSpc>
+                <a:spcPct val="115000"/>
+              </a:lnSpc>
+              <a:spcBef>
+                <a:spcPts val="400"/>
+              </a:spcBef>
+              <a:spcAft>
+                <a:spcPts val="400"/>
+              </a:spcAft>
+              <a:defRPr sz="1800">
+                <a:solidFill>
+                  <a:srgbClr val="000000"/>
+                </a:solidFill>
+              </a:defRPr>
+            </a:pPr>
+            <a:r>
+              <a:t>Étape 2 : Le menu principal s'affiche avec 10 options disponibles</a:t>
+            </a:r>
+          </a:p>
+          <a:p>
+            <a:pPr>
+              <a:lnSpc>
+                <a:spcPct val="115000"/>
+              </a:lnSpc>
+              <a:spcBef>
+                <a:spcPts val="400"/>
+              </a:spcBef>
+              <a:spcAft>
+                <a:spcPts val="400"/>
+              </a:spcAft>
+              <a:defRPr sz="1800">
+                <a:solidFill>
+                  <a:srgbClr val="000000"/>
+                </a:solidFill>
+              </a:defRPr>
+            </a:pPr>
+          </a:p>
+          <a:p>
+            <a:pPr>
+              <a:lnSpc>
+                <a:spcPct val="115000"/>
+              </a:lnSpc>
+              <a:spcBef>
+                <a:spcPts val="400"/>
+              </a:spcBef>
+              <a:spcAft>
+                <a:spcPts val="400"/>
+              </a:spcAft>
+              <a:defRPr sz="1800">
+                <a:solidFill>
+                  <a:srgbClr val="000000"/>
+                </a:solidFill>
+              </a:defRPr>
+            </a:pPr>
+            <a:r>
+              <a:t>Étape 3 : L'utilisateur saisit un numéro d'option (1-9 ou 0)</a:t>
+            </a:r>
+          </a:p>
+          <a:p>
+            <a:pPr>
+              <a:lnSpc>
+                <a:spcPct val="115000"/>
+              </a:lnSpc>
+              <a:spcBef>
+                <a:spcPts val="400"/>
+              </a:spcBef>
+              <a:spcAft>
+                <a:spcPts val="400"/>
+              </a:spcAft>
+              <a:defRPr sz="1800">
+                <a:solidFill>
+                  <a:srgbClr val="000000"/>
+                </a:solidFill>
+              </a:defRPr>
+            </a:pPr>
+          </a:p>
+          <a:p>
+            <a:pPr>
+              <a:lnSpc>
+                <a:spcPct val="115000"/>
+              </a:lnSpc>
+              <a:spcBef>
+                <a:spcPts val="400"/>
+              </a:spcBef>
+              <a:spcAft>
+                <a:spcPts val="400"/>
+              </a:spcAft>
+              <a:defRPr sz="1800">
+                <a:solidFill>
+                  <a:srgbClr val="000000"/>
+                </a:solidFill>
+              </a:defRPr>
+            </a:pPr>
+            <a:r>
+              <a:t>Étape 4 : La fonction correspondante est exécutée</a:t>
+            </a:r>
+          </a:p>
+          <a:p>
+            <a:pPr>
+              <a:lnSpc>
+                <a:spcPct val="115000"/>
+              </a:lnSpc>
+              <a:spcBef>
+                <a:spcPts val="400"/>
+              </a:spcBef>
+              <a:spcAft>
+                <a:spcPts val="400"/>
+              </a:spcAft>
+              <a:defRPr sz="1800">
+                <a:solidFill>
+                  <a:srgbClr val="000000"/>
+                </a:solidFill>
+              </a:defRPr>
+            </a:pPr>
+          </a:p>
+          <a:p>
+            <a:pPr>
+              <a:lnSpc>
+                <a:spcPct val="115000"/>
+              </a:lnSpc>
+              <a:spcBef>
+                <a:spcPts val="400"/>
+              </a:spcBef>
+              <a:spcAft>
+                <a:spcPts val="400"/>
+              </a:spcAft>
+              <a:defRPr sz="1800">
+                <a:solidFill>
+                  <a:srgbClr val="000000"/>
+                </a:solidFill>
+              </a:defRPr>
+            </a:pPr>
+            <a:r>
+              <a:t>Étape 5 : Après exécution, l'utilisateur retourne au menu pour une nouvelle action</a:t>
+            </a:r>
+          </a:p>
+          <a:p>
+            <a:pPr>
+              <a:lnSpc>
+                <a:spcPct val="115000"/>
+              </a:lnSpc>
+              <a:spcBef>
+                <a:spcPts val="400"/>
+              </a:spcBef>
+              <a:spcAft>
+                <a:spcPts val="400"/>
+              </a:spcAft>
+              <a:defRPr sz="1800">
+                <a:solidFill>
+                  <a:srgbClr val="000000"/>
+                </a:solidFill>
+              </a:defRPr>
+            </a:pPr>
+          </a:p>
+          <a:p>
+            <a:pPr>
+              <a:lnSpc>
+                <a:spcPct val="115000"/>
+              </a:lnSpc>
+              <a:spcBef>
+                <a:spcPts val="400"/>
+              </a:spcBef>
+              <a:spcAft>
+                <a:spcPts val="400"/>
+              </a:spcAft>
+              <a:defRPr sz="1800">
+                <a:solidFill>
+                  <a:srgbClr val="000000"/>
+                </a:solidFill>
+              </a:defRPr>
+            </a:pPr>
+            <a:r>
+              <a:t>Étape 6 : Le processus continue jusqu'à l'option 0 (Quitter)</a:t>
             </a:r>
           </a:p>
         </p:txBody>
@@ -3371,7 +3518,7 @@
         </p:nvSpPr>
         <p:spPr>
           <a:xfrm>
-            <a:off x="457200" y="457200"/>
+            <a:off x="457200" y="365760"/>
             <a:ext cx="8229600" cy="731520"/>
           </a:xfrm>
           <a:prstGeom prst="rect">
@@ -3393,7 +3540,7 @@
               </a:defRPr>
             </a:pPr>
             <a:r>
-              <a:t>Fonctionnalités Principales</a:t>
+              <a:t>Options du Menu Principal</a:t>
             </a:r>
           </a:p>
         </p:txBody>
@@ -3406,8 +3553,8 @@
         </p:nvSpPr>
         <p:spPr>
           <a:xfrm>
-            <a:off x="914400" y="1371600"/>
-            <a:ext cx="7315200" cy="5029200"/>
+            <a:off x="640080" y="1280160"/>
+            <a:ext cx="7863840" cy="5212080"/>
           </a:xfrm>
           <a:prstGeom prst="rect">
             <a:avLst/>
@@ -3421,110 +3568,191 @@
           <a:lstStyle/>
           <a:p>
             <a:pPr>
-              <a:spcBef>
-                <a:spcPts val="800"/>
-              </a:spcBef>
-              <a:spcAft>
-                <a:spcPts val="800"/>
-              </a:spcAft>
-              <a:defRPr sz="2000">
-                <a:solidFill>
-                  <a:srgbClr val="000000"/>
-                </a:solidFill>
-              </a:defRPr>
-            </a:pPr>
-            <a:r>
-              <a:t>✅ Ajouter et afficher les producteurs</a:t>
-            </a:r>
-          </a:p>
-          <a:p>
-            <a:pPr>
-              <a:spcBef>
-                <a:spcPts val="800"/>
-              </a:spcBef>
-              <a:spcAft>
-                <a:spcPts val="800"/>
-              </a:spcAft>
-              <a:defRPr sz="2000">
-                <a:solidFill>
-                  <a:srgbClr val="000000"/>
-                </a:solidFill>
-              </a:defRPr>
-            </a:pPr>
-            <a:r>
-              <a:t>✅ Rechercher un producteur spécifique</a:t>
-            </a:r>
-          </a:p>
-          <a:p>
-            <a:pPr>
-              <a:spcBef>
-                <a:spcPts val="800"/>
-              </a:spcBef>
-              <a:spcAft>
-                <a:spcPts val="800"/>
-              </a:spcAft>
-              <a:defRPr sz="2000">
-                <a:solidFill>
-                  <a:srgbClr val="000000"/>
-                </a:solidFill>
-              </a:defRPr>
-            </a:pPr>
-            <a:r>
-              <a:t>✅ Enregistrer les récoltes avec validation</a:t>
-            </a:r>
-          </a:p>
-          <a:p>
-            <a:pPr>
-              <a:spcBef>
-                <a:spcPts val="800"/>
-              </a:spcBef>
-              <a:spcAft>
-                <a:spcPts val="800"/>
-              </a:spcAft>
-              <a:defRPr sz="2000">
-                <a:solidFill>
-                  <a:srgbClr val="000000"/>
-                </a:solidFill>
-              </a:defRPr>
-            </a:pPr>
-            <a:r>
-              <a:t>✅ Afficher les récoltes par producteur</a:t>
-            </a:r>
-          </a:p>
-          <a:p>
-            <a:pPr>
-              <a:spcBef>
-                <a:spcPts val="800"/>
-              </a:spcBef>
-              <a:spcAft>
-                <a:spcPts val="800"/>
-              </a:spcAft>
-              <a:defRPr sz="2000">
-                <a:solidFill>
-                  <a:srgbClr val="000000"/>
-                </a:solidFill>
-              </a:defRPr>
-            </a:pPr>
-            <a:r>
-              <a:t>✅ Calculer les statistiques de production</a:t>
-            </a:r>
-          </a:p>
-          <a:p>
-            <a:pPr>
-              <a:spcBef>
-                <a:spcPts val="800"/>
-              </a:spcBef>
-              <a:spcAft>
-                <a:spcPts val="800"/>
-              </a:spcAft>
-              <a:defRPr sz="2000">
-                <a:solidFill>
-                  <a:srgbClr val="000000"/>
-                </a:solidFill>
-              </a:defRPr>
-            </a:pPr>
-            <a:r>
-              <a:t>✅ Identifier le meilleur producteur</a:t>
+              <a:lnSpc>
+                <a:spcPct val="115000"/>
+              </a:lnSpc>
+              <a:spcBef>
+                <a:spcPts val="400"/>
+              </a:spcBef>
+              <a:spcAft>
+                <a:spcPts val="400"/>
+              </a:spcAft>
+              <a:defRPr sz="1800">
+                <a:solidFill>
+                  <a:srgbClr val="000000"/>
+                </a:solidFill>
+              </a:defRPr>
+            </a:pPr>
+            <a:r>
+              <a:t>Option 1 : Ajouter un producteur - Demande le nom et valide l'unicité</a:t>
+            </a:r>
+          </a:p>
+          <a:p>
+            <a:pPr>
+              <a:lnSpc>
+                <a:spcPct val="115000"/>
+              </a:lnSpc>
+              <a:spcBef>
+                <a:spcPts val="400"/>
+              </a:spcBef>
+              <a:spcAft>
+                <a:spcPts val="400"/>
+              </a:spcAft>
+              <a:defRPr sz="1800">
+                <a:solidFill>
+                  <a:srgbClr val="000000"/>
+                </a:solidFill>
+              </a:defRPr>
+            </a:pPr>
+            <a:r>
+              <a:t>Option 2 : Afficher les producteurs - Liste tous avec nombre de récoltes</a:t>
+            </a:r>
+          </a:p>
+          <a:p>
+            <a:pPr>
+              <a:lnSpc>
+                <a:spcPct val="115000"/>
+              </a:lnSpc>
+              <a:spcBef>
+                <a:spcPts val="400"/>
+              </a:spcBef>
+              <a:spcAft>
+                <a:spcPts val="400"/>
+              </a:spcAft>
+              <a:defRPr sz="1800">
+                <a:solidFill>
+                  <a:srgbClr val="000000"/>
+                </a:solidFill>
+              </a:defRPr>
+            </a:pPr>
+            <a:r>
+              <a:t>Option 3 : Rechercher un producteur - Trouve par nom et affiche infos</a:t>
+            </a:r>
+          </a:p>
+          <a:p>
+            <a:pPr>
+              <a:lnSpc>
+                <a:spcPct val="115000"/>
+              </a:lnSpc>
+              <a:spcBef>
+                <a:spcPts val="400"/>
+              </a:spcBef>
+              <a:spcAft>
+                <a:spcPts val="400"/>
+              </a:spcAft>
+              <a:defRPr sz="1800">
+                <a:solidFill>
+                  <a:srgbClr val="000000"/>
+                </a:solidFill>
+              </a:defRPr>
+            </a:pPr>
+            <a:r>
+              <a:t>Option 4 : Enregistrer une récolte - Ajoute nouvelle récolte à un producteur</a:t>
+            </a:r>
+          </a:p>
+          <a:p>
+            <a:pPr>
+              <a:lnSpc>
+                <a:spcPct val="115000"/>
+              </a:lnSpc>
+              <a:spcBef>
+                <a:spcPts val="400"/>
+              </a:spcBef>
+              <a:spcAft>
+                <a:spcPts val="400"/>
+              </a:spcAft>
+              <a:defRPr sz="1800">
+                <a:solidFill>
+                  <a:srgbClr val="000000"/>
+                </a:solidFill>
+              </a:defRPr>
+            </a:pPr>
+            <a:r>
+              <a:t>Option 5 : Afficher les récoltes - Liste toutes ou filtrées par producteur</a:t>
+            </a:r>
+          </a:p>
+          <a:p>
+            <a:pPr>
+              <a:lnSpc>
+                <a:spcPct val="115000"/>
+              </a:lnSpc>
+              <a:spcBef>
+                <a:spcPts val="400"/>
+              </a:spcBef>
+              <a:spcAft>
+                <a:spcPts val="400"/>
+              </a:spcAft>
+              <a:defRPr sz="1800">
+                <a:solidFill>
+                  <a:srgbClr val="000000"/>
+                </a:solidFill>
+              </a:defRPr>
+            </a:pPr>
+            <a:r>
+              <a:t>Option 6 : Production totale - Somme de toutes les récoltes en kg</a:t>
+            </a:r>
+          </a:p>
+          <a:p>
+            <a:pPr>
+              <a:lnSpc>
+                <a:spcPct val="115000"/>
+              </a:lnSpc>
+              <a:spcBef>
+                <a:spcPts val="400"/>
+              </a:spcBef>
+              <a:spcAft>
+                <a:spcPts val="400"/>
+              </a:spcAft>
+              <a:defRPr sz="1800">
+                <a:solidFill>
+                  <a:srgbClr val="000000"/>
+                </a:solidFill>
+              </a:defRPr>
+            </a:pPr>
+            <a:r>
+              <a:t>Option 7 : Production par produit - Détail pour chaque type de produit</a:t>
+            </a:r>
+          </a:p>
+          <a:p>
+            <a:pPr>
+              <a:lnSpc>
+                <a:spcPct val="115000"/>
+              </a:lnSpc>
+              <a:spcBef>
+                <a:spcPts val="400"/>
+              </a:spcBef>
+              <a:spcAft>
+                <a:spcPts val="400"/>
+              </a:spcAft>
+              <a:defRPr sz="1800">
+                <a:solidFill>
+                  <a:srgbClr val="000000"/>
+                </a:solidFill>
+              </a:defRPr>
+            </a:pPr>
+            <a:r>
+              <a:t>Option 8 : Meilleur producteur - Identifie le plus productif</a:t>
+            </a:r>
+          </a:p>
+          <a:p>
+            <a:pPr>
+              <a:lnSpc>
+                <a:spcPct val="115000"/>
+              </a:lnSpc>
+              <a:spcBef>
+                <a:spcPts val="400"/>
+              </a:spcBef>
+              <a:spcAft>
+                <a:spcPts val="400"/>
+              </a:spcAft>
+              <a:defRPr sz="1800">
+                <a:solidFill>
+                  <a:srgbClr val="000000"/>
+                </a:solidFill>
+              </a:defRPr>
+            </a:pPr>
+            <a:r>
+              <a:t>Option 9 : Moyenne par producteur - Calcule la moyenne de production</a:t>
             </a:r>
           </a:p>
         </p:txBody>
@@ -3563,7 +3791,7 @@
         </p:nvSpPr>
         <p:spPr>
           <a:xfrm>
-            <a:off x="457200" y="457200"/>
+            <a:off x="457200" y="365760"/>
             <a:ext cx="8229600" cy="731520"/>
           </a:xfrm>
           <a:prstGeom prst="rect">
@@ -3585,7 +3813,7 @@
               </a:defRPr>
             </a:pPr>
             <a:r>
-              <a:t>Structure des Données</a:t>
+              <a:t>Produits Autorisés dans le Système</a:t>
             </a:r>
           </a:p>
         </p:txBody>
@@ -3598,8 +3826,8 @@
         </p:nvSpPr>
         <p:spPr>
           <a:xfrm>
-            <a:off x="914400" y="1371600"/>
-            <a:ext cx="7315200" cy="5029200"/>
+            <a:off x="640080" y="1280160"/>
+            <a:ext cx="7863840" cy="5212080"/>
           </a:xfrm>
           <a:prstGeom prst="rect">
             <a:avLst/>
@@ -3613,128 +3841,218 @@
           <a:lstStyle/>
           <a:p>
             <a:pPr>
-              <a:spcBef>
-                <a:spcPts val="800"/>
-              </a:spcBef>
-              <a:spcAft>
-                <a:spcPts val="800"/>
-              </a:spcAft>
-              <a:defRPr sz="2000">
-                <a:solidFill>
-                  <a:srgbClr val="000000"/>
-                </a:solidFill>
-              </a:defRPr>
-            </a:pPr>
-            <a:r>
-              <a:t>Producteur = {</a:t>
-            </a:r>
-          </a:p>
-          <a:p>
-            <a:pPr>
-              <a:spcBef>
-                <a:spcPts val="800"/>
-              </a:spcBef>
-              <a:spcAft>
-                <a:spcPts val="800"/>
-              </a:spcAft>
-              <a:defRPr sz="2000">
-                <a:solidFill>
-                  <a:srgbClr val="000000"/>
-                </a:solidFill>
-              </a:defRPr>
-            </a:pPr>
-            <a:r>
-              <a:t>  'nom': string,</a:t>
-            </a:r>
-          </a:p>
-          <a:p>
-            <a:pPr>
-              <a:spcBef>
-                <a:spcPts val="800"/>
-              </a:spcBef>
-              <a:spcAft>
-                <a:spcPts val="800"/>
-              </a:spcAft>
-              <a:defRPr sz="2000">
-                <a:solidFill>
-                  <a:srgbClr val="000000"/>
-                </a:solidFill>
-              </a:defRPr>
-            </a:pPr>
-            <a:r>
-              <a:t>  'recoltes': [</a:t>
-            </a:r>
-          </a:p>
-          <a:p>
-            <a:pPr>
-              <a:spcBef>
-                <a:spcPts val="800"/>
-              </a:spcBef>
-              <a:spcAft>
-                <a:spcPts val="800"/>
-              </a:spcAft>
-              <a:defRPr sz="2000">
-                <a:solidFill>
-                  <a:srgbClr val="000000"/>
-                </a:solidFill>
-              </a:defRPr>
-            </a:pPr>
-            <a:r>
-              <a:t>    {'nom': string, 'produit': string, 'quantite': float},</a:t>
-            </a:r>
-          </a:p>
-          <a:p>
-            <a:pPr>
-              <a:spcBef>
-                <a:spcPts val="800"/>
-              </a:spcBef>
-              <a:spcAft>
-                <a:spcPts val="800"/>
-              </a:spcAft>
-              <a:defRPr sz="2000">
-                <a:solidFill>
-                  <a:srgbClr val="000000"/>
-                </a:solidFill>
-              </a:defRPr>
-            </a:pPr>
-            <a:r>
-              <a:t>    ...</a:t>
-            </a:r>
-          </a:p>
-          <a:p>
-            <a:pPr>
-              <a:spcBef>
-                <a:spcPts val="800"/>
-              </a:spcBef>
-              <a:spcAft>
-                <a:spcPts val="800"/>
-              </a:spcAft>
-              <a:defRPr sz="2000">
-                <a:solidFill>
-                  <a:srgbClr val="000000"/>
-                </a:solidFill>
-              </a:defRPr>
-            </a:pPr>
-            <a:r>
-              <a:t>  ]</a:t>
-            </a:r>
-          </a:p>
-          <a:p>
-            <a:pPr>
-              <a:spcBef>
-                <a:spcPts val="800"/>
-              </a:spcBef>
-              <a:spcAft>
-                <a:spcPts val="800"/>
-              </a:spcAft>
-              <a:defRPr sz="2000">
-                <a:solidFill>
-                  <a:srgbClr val="000000"/>
-                </a:solidFill>
-              </a:defRPr>
-            </a:pPr>
-            <a:r>
-              <a:t>}</a:t>
+              <a:lnSpc>
+                <a:spcPct val="115000"/>
+              </a:lnSpc>
+              <a:spcBef>
+                <a:spcPts val="400"/>
+              </a:spcBef>
+              <a:spcAft>
+                <a:spcPts val="400"/>
+              </a:spcAft>
+              <a:defRPr sz="1800">
+                <a:solidFill>
+                  <a:srgbClr val="000000"/>
+                </a:solidFill>
+              </a:defRPr>
+            </a:pPr>
+            <a:r>
+              <a:t>Le système gère uniquement 4 types de produits agricoles :</a:t>
+            </a:r>
+          </a:p>
+          <a:p>
+            <a:pPr>
+              <a:lnSpc>
+                <a:spcPct val="115000"/>
+              </a:lnSpc>
+              <a:spcBef>
+                <a:spcPts val="400"/>
+              </a:spcBef>
+              <a:spcAft>
+                <a:spcPts val="400"/>
+              </a:spcAft>
+              <a:defRPr sz="1800">
+                <a:solidFill>
+                  <a:srgbClr val="000000"/>
+                </a:solidFill>
+              </a:defRPr>
+            </a:pPr>
+          </a:p>
+          <a:p>
+            <a:pPr>
+              <a:lnSpc>
+                <a:spcPct val="115000"/>
+              </a:lnSpc>
+              <a:spcBef>
+                <a:spcPts val="400"/>
+              </a:spcBef>
+              <a:spcAft>
+                <a:spcPts val="400"/>
+              </a:spcAft>
+              <a:defRPr sz="1800">
+                <a:solidFill>
+                  <a:srgbClr val="000000"/>
+                </a:solidFill>
+              </a:defRPr>
+            </a:pPr>
+            <a:r>
+              <a:t>1. MIL - Céréale traditionnelle très résistante à la chaleur et à la sécheresse</a:t>
+            </a:r>
+          </a:p>
+          <a:p>
+            <a:pPr>
+              <a:lnSpc>
+                <a:spcPct val="115000"/>
+              </a:lnSpc>
+              <a:spcBef>
+                <a:spcPts val="400"/>
+              </a:spcBef>
+              <a:spcAft>
+                <a:spcPts val="400"/>
+              </a:spcAft>
+              <a:defRPr sz="1800">
+                <a:solidFill>
+                  <a:srgbClr val="000000"/>
+                </a:solidFill>
+              </a:defRPr>
+            </a:pPr>
+          </a:p>
+          <a:p>
+            <a:pPr>
+              <a:lnSpc>
+                <a:spcPct val="115000"/>
+              </a:lnSpc>
+              <a:spcBef>
+                <a:spcPts val="400"/>
+              </a:spcBef>
+              <a:spcAft>
+                <a:spcPts val="400"/>
+              </a:spcAft>
+              <a:defRPr sz="1800">
+                <a:solidFill>
+                  <a:srgbClr val="000000"/>
+                </a:solidFill>
+              </a:defRPr>
+            </a:pPr>
+            <a:r>
+              <a:t>2. MAÏS - Céréale polyvalente cultivée largement en Afrique</a:t>
+            </a:r>
+          </a:p>
+          <a:p>
+            <a:pPr>
+              <a:lnSpc>
+                <a:spcPct val="115000"/>
+              </a:lnSpc>
+              <a:spcBef>
+                <a:spcPts val="400"/>
+              </a:spcBef>
+              <a:spcAft>
+                <a:spcPts val="400"/>
+              </a:spcAft>
+              <a:defRPr sz="1800">
+                <a:solidFill>
+                  <a:srgbClr val="000000"/>
+                </a:solidFill>
+              </a:defRPr>
+            </a:pPr>
+          </a:p>
+          <a:p>
+            <a:pPr>
+              <a:lnSpc>
+                <a:spcPct val="115000"/>
+              </a:lnSpc>
+              <a:spcBef>
+                <a:spcPts val="400"/>
+              </a:spcBef>
+              <a:spcAft>
+                <a:spcPts val="400"/>
+              </a:spcAft>
+              <a:defRPr sz="1800">
+                <a:solidFill>
+                  <a:srgbClr val="000000"/>
+                </a:solidFill>
+              </a:defRPr>
+            </a:pPr>
+            <a:r>
+              <a:t>3. RIZ - Céréale cultivée en zones irrigables ou pluvieuses</a:t>
+            </a:r>
+          </a:p>
+          <a:p>
+            <a:pPr>
+              <a:lnSpc>
+                <a:spcPct val="115000"/>
+              </a:lnSpc>
+              <a:spcBef>
+                <a:spcPts val="400"/>
+              </a:spcBef>
+              <a:spcAft>
+                <a:spcPts val="400"/>
+              </a:spcAft>
+              <a:defRPr sz="1800">
+                <a:solidFill>
+                  <a:srgbClr val="000000"/>
+                </a:solidFill>
+              </a:defRPr>
+            </a:pPr>
+          </a:p>
+          <a:p>
+            <a:pPr>
+              <a:lnSpc>
+                <a:spcPct val="115000"/>
+              </a:lnSpc>
+              <a:spcBef>
+                <a:spcPts val="400"/>
+              </a:spcBef>
+              <a:spcAft>
+                <a:spcPts val="400"/>
+              </a:spcAft>
+              <a:defRPr sz="1800">
+                <a:solidFill>
+                  <a:srgbClr val="000000"/>
+                </a:solidFill>
+              </a:defRPr>
+            </a:pPr>
+            <a:r>
+              <a:t>4. ARACHIDE - Culture de rente importante pour les revenus agricoles</a:t>
+            </a:r>
+          </a:p>
+          <a:p>
+            <a:pPr>
+              <a:lnSpc>
+                <a:spcPct val="115000"/>
+              </a:lnSpc>
+              <a:spcBef>
+                <a:spcPts val="400"/>
+              </a:spcBef>
+              <a:spcAft>
+                <a:spcPts val="400"/>
+              </a:spcAft>
+              <a:defRPr sz="1800">
+                <a:solidFill>
+                  <a:srgbClr val="000000"/>
+                </a:solidFill>
+              </a:defRPr>
+            </a:pPr>
+          </a:p>
+          <a:p>
+            <a:pPr>
+              <a:lnSpc>
+                <a:spcPct val="115000"/>
+              </a:lnSpc>
+              <a:spcBef>
+                <a:spcPts val="400"/>
+              </a:spcBef>
+              <a:spcAft>
+                <a:spcPts val="400"/>
+              </a:spcAft>
+              <a:defRPr sz="1800">
+                <a:solidFill>
+                  <a:srgbClr val="000000"/>
+                </a:solidFill>
+              </a:defRPr>
+            </a:pPr>
+            <a:r>
+              <a:t>Tous les produits saisis sont automatiquement normalisés en majuscules</a:t>
             </a:r>
           </a:p>
         </p:txBody>
@@ -3773,7 +4091,7 @@
         </p:nvSpPr>
         <p:spPr>
           <a:xfrm>
-            <a:off x="457200" y="457200"/>
+            <a:off x="457200" y="365760"/>
             <a:ext cx="8229600" cy="731520"/>
           </a:xfrm>
           <a:prstGeom prst="rect">
@@ -3795,7 +4113,7 @@
               </a:defRPr>
             </a:pPr>
             <a:r>
-              <a:t>Validation et Contrôle de Qualité</a:t>
+              <a:t>Structure des Données du Système</a:t>
             </a:r>
           </a:p>
         </p:txBody>
@@ -3808,8 +4126,8 @@
         </p:nvSpPr>
         <p:spPr>
           <a:xfrm>
-            <a:off x="914400" y="1371600"/>
-            <a:ext cx="7315200" cy="5029200"/>
+            <a:off x="640080" y="1280160"/>
+            <a:ext cx="7863840" cy="5212080"/>
           </a:xfrm>
           <a:prstGeom prst="rect">
             <a:avLst/>
@@ -3823,92 +4141,230 @@
           <a:lstStyle/>
           <a:p>
             <a:pPr>
-              <a:spcBef>
-                <a:spcPts val="800"/>
-              </a:spcBef>
-              <a:spcAft>
-                <a:spcPts val="800"/>
-              </a:spcAft>
-              <a:defRPr sz="2000">
-                <a:solidFill>
-                  <a:srgbClr val="000000"/>
-                </a:solidFill>
-              </a:defRPr>
-            </a:pPr>
-            <a:r>
-              <a:t>✓ Validation des noms (non vide, pas de doublons)</a:t>
-            </a:r>
-          </a:p>
-          <a:p>
-            <a:pPr>
-              <a:spcBef>
-                <a:spcPts val="800"/>
-              </a:spcBef>
-              <a:spcAft>
-                <a:spcPts val="800"/>
-              </a:spcAft>
-              <a:defRPr sz="2000">
-                <a:solidFill>
-                  <a:srgbClr val="000000"/>
-                </a:solidFill>
-              </a:defRPr>
-            </a:pPr>
-            <a:r>
-              <a:t>✓ Validation des produits (liste fermée)</a:t>
-            </a:r>
-          </a:p>
-          <a:p>
-            <a:pPr>
-              <a:spcBef>
-                <a:spcPts val="800"/>
-              </a:spcBef>
-              <a:spcAft>
-                <a:spcPts val="800"/>
-              </a:spcAft>
-              <a:defRPr sz="2000">
-                <a:solidFill>
-                  <a:srgbClr val="000000"/>
-                </a:solidFill>
-              </a:defRPr>
-            </a:pPr>
-            <a:r>
-              <a:t>✓ Validation des quantités (positives, nombre valide)</a:t>
-            </a:r>
-          </a:p>
-          <a:p>
-            <a:pPr>
-              <a:spcBef>
-                <a:spcPts val="800"/>
-              </a:spcBef>
-              <a:spcAft>
-                <a:spcPts val="800"/>
-              </a:spcAft>
-              <a:defRPr sz="2000">
-                <a:solidFill>
-                  <a:srgbClr val="000000"/>
-                </a:solidFill>
-              </a:defRPr>
-            </a:pPr>
-            <a:r>
-              <a:t>✓ Gestion d'erreurs complète</a:t>
-            </a:r>
-          </a:p>
-          <a:p>
-            <a:pPr>
-              <a:spcBef>
-                <a:spcPts val="800"/>
-              </a:spcBef>
-              <a:spcAft>
-                <a:spcPts val="800"/>
-              </a:spcAft>
-              <a:defRPr sz="2000">
-                <a:solidFill>
-                  <a:srgbClr val="000000"/>
-                </a:solidFill>
-              </a:defRPr>
-            </a:pPr>
-            <a:r>
-              <a:t>✓ Messages clairs à l'utilisateur</a:t>
+              <a:lnSpc>
+                <a:spcPct val="115000"/>
+              </a:lnSpc>
+              <a:spcBef>
+                <a:spcPts val="400"/>
+              </a:spcBef>
+              <a:spcAft>
+                <a:spcPts val="400"/>
+              </a:spcAft>
+              <a:defRPr sz="1800">
+                <a:solidFill>
+                  <a:srgbClr val="000000"/>
+                </a:solidFill>
+              </a:defRPr>
+            </a:pPr>
+            <a:r>
+              <a:t>Les données sont organisées dans une structure Python basée sur des dictionnaires :</a:t>
+            </a:r>
+          </a:p>
+          <a:p>
+            <a:pPr>
+              <a:lnSpc>
+                <a:spcPct val="115000"/>
+              </a:lnSpc>
+              <a:spcBef>
+                <a:spcPts val="400"/>
+              </a:spcBef>
+              <a:spcAft>
+                <a:spcPts val="400"/>
+              </a:spcAft>
+              <a:defRPr sz="1800">
+                <a:solidFill>
+                  <a:srgbClr val="000000"/>
+                </a:solidFill>
+              </a:defRPr>
+            </a:pPr>
+          </a:p>
+          <a:p>
+            <a:pPr>
+              <a:lnSpc>
+                <a:spcPct val="115000"/>
+              </a:lnSpc>
+              <a:spcBef>
+                <a:spcPts val="400"/>
+              </a:spcBef>
+              <a:spcAft>
+                <a:spcPts val="400"/>
+              </a:spcAft>
+              <a:defRPr sz="1800">
+                <a:solidFill>
+                  <a:srgbClr val="000000"/>
+                </a:solidFill>
+              </a:defRPr>
+            </a:pPr>
+            <a:r>
+              <a:t>producteurs = [</a:t>
+            </a:r>
+          </a:p>
+          <a:p>
+            <a:pPr>
+              <a:lnSpc>
+                <a:spcPct val="115000"/>
+              </a:lnSpc>
+              <a:spcBef>
+                <a:spcPts val="400"/>
+              </a:spcBef>
+              <a:spcAft>
+                <a:spcPts val="400"/>
+              </a:spcAft>
+              <a:defRPr sz="1800">
+                <a:solidFill>
+                  <a:srgbClr val="000000"/>
+                </a:solidFill>
+              </a:defRPr>
+            </a:pPr>
+            <a:r>
+              <a:t>  {</a:t>
+            </a:r>
+          </a:p>
+          <a:p>
+            <a:pPr>
+              <a:lnSpc>
+                <a:spcPct val="115000"/>
+              </a:lnSpc>
+              <a:spcBef>
+                <a:spcPts val="400"/>
+              </a:spcBef>
+              <a:spcAft>
+                <a:spcPts val="400"/>
+              </a:spcAft>
+              <a:defRPr sz="1800">
+                <a:solidFill>
+                  <a:srgbClr val="000000"/>
+                </a:solidFill>
+              </a:defRPr>
+            </a:pPr>
+            <a:r>
+              <a:t>    'nom': 'Producteur 1',</a:t>
+            </a:r>
+          </a:p>
+          <a:p>
+            <a:pPr>
+              <a:lnSpc>
+                <a:spcPct val="115000"/>
+              </a:lnSpc>
+              <a:spcBef>
+                <a:spcPts val="400"/>
+              </a:spcBef>
+              <a:spcAft>
+                <a:spcPts val="400"/>
+              </a:spcAft>
+              <a:defRPr sz="1800">
+                <a:solidFill>
+                  <a:srgbClr val="000000"/>
+                </a:solidFill>
+              </a:defRPr>
+            </a:pPr>
+            <a:r>
+              <a:t>    'recoltes': [</a:t>
+            </a:r>
+          </a:p>
+          <a:p>
+            <a:pPr>
+              <a:lnSpc>
+                <a:spcPct val="115000"/>
+              </a:lnSpc>
+              <a:spcBef>
+                <a:spcPts val="400"/>
+              </a:spcBef>
+              <a:spcAft>
+                <a:spcPts val="400"/>
+              </a:spcAft>
+              <a:defRPr sz="1800">
+                <a:solidFill>
+                  <a:srgbClr val="000000"/>
+                </a:solidFill>
+              </a:defRPr>
+            </a:pPr>
+            <a:r>
+              <a:t>      {'nom': 'Producteur 1', 'produit': 'Mil', 'quantite': 100.5},</a:t>
+            </a:r>
+          </a:p>
+          <a:p>
+            <a:pPr>
+              <a:lnSpc>
+                <a:spcPct val="115000"/>
+              </a:lnSpc>
+              <a:spcBef>
+                <a:spcPts val="400"/>
+              </a:spcBef>
+              <a:spcAft>
+                <a:spcPts val="400"/>
+              </a:spcAft>
+              <a:defRPr sz="1800">
+                <a:solidFill>
+                  <a:srgbClr val="000000"/>
+                </a:solidFill>
+              </a:defRPr>
+            </a:pPr>
+            <a:r>
+              <a:t>      {'nom': 'Producteur 1', 'produit': 'Riz', 'quantite': 75.0}</a:t>
+            </a:r>
+          </a:p>
+          <a:p>
+            <a:pPr>
+              <a:lnSpc>
+                <a:spcPct val="115000"/>
+              </a:lnSpc>
+              <a:spcBef>
+                <a:spcPts val="400"/>
+              </a:spcBef>
+              <a:spcAft>
+                <a:spcPts val="400"/>
+              </a:spcAft>
+              <a:defRPr sz="1800">
+                <a:solidFill>
+                  <a:srgbClr val="000000"/>
+                </a:solidFill>
+              </a:defRPr>
+            </a:pPr>
+            <a:r>
+              <a:t>    ]</a:t>
+            </a:r>
+          </a:p>
+          <a:p>
+            <a:pPr>
+              <a:lnSpc>
+                <a:spcPct val="115000"/>
+              </a:lnSpc>
+              <a:spcBef>
+                <a:spcPts val="400"/>
+              </a:spcBef>
+              <a:spcAft>
+                <a:spcPts val="400"/>
+              </a:spcAft>
+              <a:defRPr sz="1800">
+                <a:solidFill>
+                  <a:srgbClr val="000000"/>
+                </a:solidFill>
+              </a:defRPr>
+            </a:pPr>
+            <a:r>
+              <a:t>  }</a:t>
+            </a:r>
+          </a:p>
+          <a:p>
+            <a:pPr>
+              <a:lnSpc>
+                <a:spcPct val="115000"/>
+              </a:lnSpc>
+              <a:spcBef>
+                <a:spcPts val="400"/>
+              </a:spcBef>
+              <a:spcAft>
+                <a:spcPts val="400"/>
+              </a:spcAft>
+              <a:defRPr sz="1800">
+                <a:solidFill>
+                  <a:srgbClr val="000000"/>
+                </a:solidFill>
+              </a:defRPr>
+            </a:pPr>
+            <a:r>
+              <a:t>]</a:t>
             </a:r>
           </a:p>
         </p:txBody>
@@ -3947,7 +4403,7 @@
         </p:nvSpPr>
         <p:spPr>
           <a:xfrm>
-            <a:off x="457200" y="457200"/>
+            <a:off x="457200" y="365760"/>
             <a:ext cx="8229600" cy="731520"/>
           </a:xfrm>
           <a:prstGeom prst="rect">
@@ -3969,7 +4425,7 @@
               </a:defRPr>
             </a:pPr>
             <a:r>
-              <a:t>Technologies Utilisées</a:t>
+              <a:t>Système de Validation et Contrôle de Qualité</a:t>
             </a:r>
           </a:p>
         </p:txBody>
@@ -3982,8 +4438,8 @@
         </p:nvSpPr>
         <p:spPr>
           <a:xfrm>
-            <a:off x="914400" y="1371600"/>
-            <a:ext cx="7315200" cy="5029200"/>
+            <a:off x="640080" y="1280160"/>
+            <a:ext cx="7863840" cy="5212080"/>
           </a:xfrm>
           <a:prstGeom prst="rect">
             <a:avLst/>
@@ -3997,92 +4453,227 @@
           <a:lstStyle/>
           <a:p>
             <a:pPr>
-              <a:spcBef>
-                <a:spcPts val="800"/>
-              </a:spcBef>
-              <a:spcAft>
-                <a:spcPts val="800"/>
-              </a:spcAft>
-              <a:defRPr sz="2000">
-                <a:solidFill>
-                  <a:srgbClr val="000000"/>
-                </a:solidFill>
-              </a:defRPr>
-            </a:pPr>
-            <a:r>
-              <a:t>🐍 Python 3.x - Langage de programmation</a:t>
-            </a:r>
-          </a:p>
-          <a:p>
-            <a:pPr>
-              <a:spcBef>
-                <a:spcPts val="800"/>
-              </a:spcBef>
-              <a:spcAft>
-                <a:spcPts val="800"/>
-              </a:spcAft>
-              <a:defRPr sz="2000">
-                <a:solidFill>
-                  <a:srgbClr val="000000"/>
-                </a:solidFill>
-              </a:defRPr>
-            </a:pPr>
-            <a:r>
-              <a:t>📦 Modules standards Python (pas de dépendances externes)</a:t>
-            </a:r>
-          </a:p>
-          <a:p>
-            <a:pPr>
-              <a:spcBef>
-                <a:spcPts val="800"/>
-              </a:spcBef>
-              <a:spcAft>
-                <a:spcPts val="800"/>
-              </a:spcAft>
-              <a:defRPr sz="2000">
-                <a:solidFill>
-                  <a:srgbClr val="000000"/>
-                </a:solidFill>
-              </a:defRPr>
-            </a:pPr>
-            <a:r>
-              <a:t>🔧 Dictionnaires et listes pour la structure de données</a:t>
-            </a:r>
-          </a:p>
-          <a:p>
-            <a:pPr>
-              <a:spcBef>
-                <a:spcPts val="800"/>
-              </a:spcBef>
-              <a:spcAft>
-                <a:spcPts val="800"/>
-              </a:spcAft>
-              <a:defRPr sz="2000">
-                <a:solidFill>
-                  <a:srgbClr val="000000"/>
-                </a:solidFill>
-              </a:defRPr>
-            </a:pPr>
-            <a:r>
-              <a:t>💾 Données en mémoire (pas de base de données)</a:t>
-            </a:r>
-          </a:p>
-          <a:p>
-            <a:pPr>
-              <a:spcBef>
-                <a:spcPts val="800"/>
-              </a:spcBef>
-              <a:spcAft>
-                <a:spcPts val="800"/>
-              </a:spcAft>
-              <a:defRPr sz="2000">
-                <a:solidFill>
-                  <a:srgbClr val="000000"/>
-                </a:solidFill>
-              </a:defRPr>
-            </a:pPr>
-            <a:r>
-              <a:t>📝 Version contrôle : Git &amp; GitHub</a:t>
+              <a:lnSpc>
+                <a:spcPct val="115000"/>
+              </a:lnSpc>
+              <a:spcBef>
+                <a:spcPts val="400"/>
+              </a:spcBef>
+              <a:spcAft>
+                <a:spcPts val="400"/>
+              </a:spcAft>
+              <a:defRPr sz="1800">
+                <a:solidFill>
+                  <a:srgbClr val="000000"/>
+                </a:solidFill>
+              </a:defRPr>
+            </a:pPr>
+            <a:r>
+              <a:t>Le système implémente une validation stricte à chaque étape :</a:t>
+            </a:r>
+          </a:p>
+          <a:p>
+            <a:pPr>
+              <a:lnSpc>
+                <a:spcPct val="115000"/>
+              </a:lnSpc>
+              <a:spcBef>
+                <a:spcPts val="400"/>
+              </a:spcBef>
+              <a:spcAft>
+                <a:spcPts val="400"/>
+              </a:spcAft>
+              <a:defRPr sz="1800">
+                <a:solidFill>
+                  <a:srgbClr val="000000"/>
+                </a:solidFill>
+              </a:defRPr>
+            </a:pPr>
+          </a:p>
+          <a:p>
+            <a:pPr>
+              <a:lnSpc>
+                <a:spcPct val="115000"/>
+              </a:lnSpc>
+              <a:spcBef>
+                <a:spcPts val="400"/>
+              </a:spcBef>
+              <a:spcAft>
+                <a:spcPts val="400"/>
+              </a:spcAft>
+              <a:defRPr sz="1800">
+                <a:solidFill>
+                  <a:srgbClr val="000000"/>
+                </a:solidFill>
+              </a:defRPr>
+            </a:pPr>
+            <a:r>
+              <a:t>Validation des Producteurs :</a:t>
+            </a:r>
+          </a:p>
+          <a:p>
+            <a:pPr>
+              <a:lnSpc>
+                <a:spcPct val="115000"/>
+              </a:lnSpc>
+              <a:spcBef>
+                <a:spcPts val="400"/>
+              </a:spcBef>
+              <a:spcAft>
+                <a:spcPts val="400"/>
+              </a:spcAft>
+              <a:defRPr sz="1800">
+                <a:solidFill>
+                  <a:srgbClr val="000000"/>
+                </a:solidFill>
+              </a:defRPr>
+            </a:pPr>
+            <a:r>
+              <a:t>- Le nom ne peut pas être vide</a:t>
+            </a:r>
+          </a:p>
+          <a:p>
+            <a:pPr>
+              <a:lnSpc>
+                <a:spcPct val="115000"/>
+              </a:lnSpc>
+              <a:spcBef>
+                <a:spcPts val="400"/>
+              </a:spcBef>
+              <a:spcAft>
+                <a:spcPts val="400"/>
+              </a:spcAft>
+              <a:defRPr sz="1800">
+                <a:solidFill>
+                  <a:srgbClr val="000000"/>
+                </a:solidFill>
+              </a:defRPr>
+            </a:pPr>
+            <a:r>
+              <a:t>- Les doublons sont détectés et rejetés</a:t>
+            </a:r>
+          </a:p>
+          <a:p>
+            <a:pPr>
+              <a:lnSpc>
+                <a:spcPct val="115000"/>
+              </a:lnSpc>
+              <a:spcBef>
+                <a:spcPts val="400"/>
+              </a:spcBef>
+              <a:spcAft>
+                <a:spcPts val="400"/>
+              </a:spcAft>
+              <a:defRPr sz="1800">
+                <a:solidFill>
+                  <a:srgbClr val="000000"/>
+                </a:solidFill>
+              </a:defRPr>
+            </a:pPr>
+            <a:r>
+              <a:t>- Recherche insensible à la casse</a:t>
+            </a:r>
+          </a:p>
+          <a:p>
+            <a:pPr>
+              <a:lnSpc>
+                <a:spcPct val="115000"/>
+              </a:lnSpc>
+              <a:spcBef>
+                <a:spcPts val="400"/>
+              </a:spcBef>
+              <a:spcAft>
+                <a:spcPts val="400"/>
+              </a:spcAft>
+              <a:defRPr sz="1800">
+                <a:solidFill>
+                  <a:srgbClr val="000000"/>
+                </a:solidFill>
+              </a:defRPr>
+            </a:pPr>
+          </a:p>
+          <a:p>
+            <a:pPr>
+              <a:lnSpc>
+                <a:spcPct val="115000"/>
+              </a:lnSpc>
+              <a:spcBef>
+                <a:spcPts val="400"/>
+              </a:spcBef>
+              <a:spcAft>
+                <a:spcPts val="400"/>
+              </a:spcAft>
+              <a:defRPr sz="1800">
+                <a:solidFill>
+                  <a:srgbClr val="000000"/>
+                </a:solidFill>
+              </a:defRPr>
+            </a:pPr>
+            <a:r>
+              <a:t>Validation des Récoltes :</a:t>
+            </a:r>
+          </a:p>
+          <a:p>
+            <a:pPr>
+              <a:lnSpc>
+                <a:spcPct val="115000"/>
+              </a:lnSpc>
+              <a:spcBef>
+                <a:spcPts val="400"/>
+              </a:spcBef>
+              <a:spcAft>
+                <a:spcPts val="400"/>
+              </a:spcAft>
+              <a:defRPr sz="1800">
+                <a:solidFill>
+                  <a:srgbClr val="000000"/>
+                </a:solidFill>
+              </a:defRPr>
+            </a:pPr>
+            <a:r>
+              <a:t>- Le producteur doit exister avant d'enregistrer une récolte</a:t>
+            </a:r>
+          </a:p>
+          <a:p>
+            <a:pPr>
+              <a:lnSpc>
+                <a:spcPct val="115000"/>
+              </a:lnSpc>
+              <a:spcBef>
+                <a:spcPts val="400"/>
+              </a:spcBef>
+              <a:spcAft>
+                <a:spcPts val="400"/>
+              </a:spcAft>
+              <a:defRPr sz="1800">
+                <a:solidFill>
+                  <a:srgbClr val="000000"/>
+                </a:solidFill>
+              </a:defRPr>
+            </a:pPr>
+            <a:r>
+              <a:t>- Le produit doit être dans la liste autorisée</a:t>
+            </a:r>
+          </a:p>
+          <a:p>
+            <a:pPr>
+              <a:lnSpc>
+                <a:spcPct val="115000"/>
+              </a:lnSpc>
+              <a:spcBef>
+                <a:spcPts val="400"/>
+              </a:spcBef>
+              <a:spcAft>
+                <a:spcPts val="400"/>
+              </a:spcAft>
+              <a:defRPr sz="1800">
+                <a:solidFill>
+                  <a:srgbClr val="000000"/>
+                </a:solidFill>
+              </a:defRPr>
+            </a:pPr>
+            <a:r>
+              <a:t>- La quantité doit être un nombre positif supérieur à zéro</a:t>
             </a:r>
           </a:p>
         </p:txBody>
@@ -4121,7 +4712,7 @@
         </p:nvSpPr>
         <p:spPr>
           <a:xfrm>
-            <a:off x="457200" y="457200"/>
+            <a:off x="457200" y="365760"/>
             <a:ext cx="8229600" cy="731520"/>
           </a:xfrm>
           <a:prstGeom prst="rect">
@@ -4143,7 +4734,7 @@
               </a:defRPr>
             </a:pPr>
             <a:r>
-              <a:t>Avantages du Système</a:t>
+              <a:t>Technologies et Outils Utilisés</a:t>
             </a:r>
           </a:p>
         </p:txBody>
@@ -4156,8 +4747,8 @@
         </p:nvSpPr>
         <p:spPr>
           <a:xfrm>
-            <a:off x="914400" y="1371600"/>
-            <a:ext cx="7315200" cy="5029200"/>
+            <a:off x="640080" y="1280160"/>
+            <a:ext cx="7863840" cy="5212080"/>
           </a:xfrm>
           <a:prstGeom prst="rect">
             <a:avLst/>
@@ -4171,92 +4762,224 @@
           <a:lstStyle/>
           <a:p>
             <a:pPr>
-              <a:spcBef>
-                <a:spcPts val="800"/>
-              </a:spcBef>
-              <a:spcAft>
-                <a:spcPts val="800"/>
-              </a:spcAft>
-              <a:defRPr sz="2000">
-                <a:solidFill>
-                  <a:srgbClr val="000000"/>
-                </a:solidFill>
-              </a:defRPr>
-            </a:pPr>
-            <a:r>
-              <a:t>✨ Simple et intuitif à utiliser</a:t>
-            </a:r>
-          </a:p>
-          <a:p>
-            <a:pPr>
-              <a:spcBef>
-                <a:spcPts val="800"/>
-              </a:spcBef>
-              <a:spcAft>
-                <a:spcPts val="800"/>
-              </a:spcAft>
-              <a:defRPr sz="2000">
-                <a:solidFill>
-                  <a:srgbClr val="000000"/>
-                </a:solidFill>
-              </a:defRPr>
-            </a:pPr>
-            <a:r>
-              <a:t>📊 Rapports de production détaillés</a:t>
-            </a:r>
-          </a:p>
-          <a:p>
-            <a:pPr>
-              <a:spcBef>
-                <a:spcPts val="800"/>
-              </a:spcBef>
-              <a:spcAft>
-                <a:spcPts val="800"/>
-              </a:spcAft>
-              <a:defRPr sz="2000">
-                <a:solidFill>
-                  <a:srgbClr val="000000"/>
-                </a:solidFill>
-              </a:defRPr>
-            </a:pPr>
-            <a:r>
-              <a:t>🔍 Recherche rapide des producteurs</a:t>
-            </a:r>
-          </a:p>
-          <a:p>
-            <a:pPr>
-              <a:spcBef>
-                <a:spcPts val="800"/>
-              </a:spcBef>
-              <a:spcAft>
-                <a:spcPts val="800"/>
-              </a:spcAft>
-              <a:defRPr sz="2000">
-                <a:solidFill>
-                  <a:srgbClr val="000000"/>
-                </a:solidFill>
-              </a:defRPr>
-            </a:pPr>
-            <a:r>
-              <a:t>📈 Suivi de la productivité</a:t>
-            </a:r>
-          </a:p>
-          <a:p>
-            <a:pPr>
-              <a:spcBef>
-                <a:spcPts val="800"/>
-              </a:spcBef>
-              <a:spcAft>
-                <a:spcPts val="800"/>
-              </a:spcAft>
-              <a:defRPr sz="2000">
-                <a:solidFill>
-                  <a:srgbClr val="000000"/>
-                </a:solidFill>
-              </a:defRPr>
-            </a:pPr>
-            <a:r>
-              <a:t>🛡️ Données validées et cohérentes</a:t>
+              <a:lnSpc>
+                <a:spcPct val="115000"/>
+              </a:lnSpc>
+              <a:spcBef>
+                <a:spcPts val="400"/>
+              </a:spcBef>
+              <a:spcAft>
+                <a:spcPts val="400"/>
+              </a:spcAft>
+              <a:defRPr sz="1800">
+                <a:solidFill>
+                  <a:srgbClr val="000000"/>
+                </a:solidFill>
+              </a:defRPr>
+            </a:pPr>
+            <a:r>
+              <a:t>Langage de programmation : Python 3.x</a:t>
+            </a:r>
+          </a:p>
+          <a:p>
+            <a:pPr>
+              <a:lnSpc>
+                <a:spcPct val="115000"/>
+              </a:lnSpc>
+              <a:spcBef>
+                <a:spcPts val="400"/>
+              </a:spcBef>
+              <a:spcAft>
+                <a:spcPts val="400"/>
+              </a:spcAft>
+              <a:defRPr sz="1800">
+                <a:solidFill>
+                  <a:srgbClr val="000000"/>
+                </a:solidFill>
+              </a:defRPr>
+            </a:pPr>
+            <a:r>
+              <a:t>   - Choisi pour sa simplicité et sa puissance pour traiter les données</a:t>
+            </a:r>
+          </a:p>
+          <a:p>
+            <a:pPr>
+              <a:lnSpc>
+                <a:spcPct val="115000"/>
+              </a:lnSpc>
+              <a:spcBef>
+                <a:spcPts val="400"/>
+              </a:spcBef>
+              <a:spcAft>
+                <a:spcPts val="400"/>
+              </a:spcAft>
+              <a:defRPr sz="1800">
+                <a:solidFill>
+                  <a:srgbClr val="000000"/>
+                </a:solidFill>
+              </a:defRPr>
+            </a:pPr>
+          </a:p>
+          <a:p>
+            <a:pPr>
+              <a:lnSpc>
+                <a:spcPct val="115000"/>
+              </a:lnSpc>
+              <a:spcBef>
+                <a:spcPts val="400"/>
+              </a:spcBef>
+              <a:spcAft>
+                <a:spcPts val="400"/>
+              </a:spcAft>
+              <a:defRPr sz="1800">
+                <a:solidFill>
+                  <a:srgbClr val="000000"/>
+                </a:solidFill>
+              </a:defRPr>
+            </a:pPr>
+            <a:r>
+              <a:t>Structures de données : Dictionnaires et Listes Python</a:t>
+            </a:r>
+          </a:p>
+          <a:p>
+            <a:pPr>
+              <a:lnSpc>
+                <a:spcPct val="115000"/>
+              </a:lnSpc>
+              <a:spcBef>
+                <a:spcPts val="400"/>
+              </a:spcBef>
+              <a:spcAft>
+                <a:spcPts val="400"/>
+              </a:spcAft>
+              <a:defRPr sz="1800">
+                <a:solidFill>
+                  <a:srgbClr val="000000"/>
+                </a:solidFill>
+              </a:defRPr>
+            </a:pPr>
+            <a:r>
+              <a:t>   - Permettent une organisation flexible des données</a:t>
+            </a:r>
+          </a:p>
+          <a:p>
+            <a:pPr>
+              <a:lnSpc>
+                <a:spcPct val="115000"/>
+              </a:lnSpc>
+              <a:spcBef>
+                <a:spcPts val="400"/>
+              </a:spcBef>
+              <a:spcAft>
+                <a:spcPts val="400"/>
+              </a:spcAft>
+              <a:defRPr sz="1800">
+                <a:solidFill>
+                  <a:srgbClr val="000000"/>
+                </a:solidFill>
+              </a:defRPr>
+            </a:pPr>
+          </a:p>
+          <a:p>
+            <a:pPr>
+              <a:lnSpc>
+                <a:spcPct val="115000"/>
+              </a:lnSpc>
+              <a:spcBef>
+                <a:spcPts val="400"/>
+              </a:spcBef>
+              <a:spcAft>
+                <a:spcPts val="400"/>
+              </a:spcAft>
+              <a:defRPr sz="1800">
+                <a:solidFill>
+                  <a:srgbClr val="000000"/>
+                </a:solidFill>
+              </a:defRPr>
+            </a:pPr>
+            <a:r>
+              <a:t>Stockage : Données en mémoire (variables Python)</a:t>
+            </a:r>
+          </a:p>
+          <a:p>
+            <a:pPr>
+              <a:lnSpc>
+                <a:spcPct val="115000"/>
+              </a:lnSpc>
+              <a:spcBef>
+                <a:spcPts val="400"/>
+              </a:spcBef>
+              <a:spcAft>
+                <a:spcPts val="400"/>
+              </a:spcAft>
+              <a:defRPr sz="1800">
+                <a:solidFill>
+                  <a:srgbClr val="000000"/>
+                </a:solidFill>
+              </a:defRPr>
+            </a:pPr>
+            <a:r>
+              <a:t>   - Les données restent actives durant l'exécution du programme</a:t>
+            </a:r>
+          </a:p>
+          <a:p>
+            <a:pPr>
+              <a:lnSpc>
+                <a:spcPct val="115000"/>
+              </a:lnSpc>
+              <a:spcBef>
+                <a:spcPts val="400"/>
+              </a:spcBef>
+              <a:spcAft>
+                <a:spcPts val="400"/>
+              </a:spcAft>
+              <a:defRPr sz="1800">
+                <a:solidFill>
+                  <a:srgbClr val="000000"/>
+                </a:solidFill>
+              </a:defRPr>
+            </a:pPr>
+          </a:p>
+          <a:p>
+            <a:pPr>
+              <a:lnSpc>
+                <a:spcPct val="115000"/>
+              </a:lnSpc>
+              <a:spcBef>
+                <a:spcPts val="400"/>
+              </a:spcBef>
+              <a:spcAft>
+                <a:spcPts val="400"/>
+              </a:spcAft>
+              <a:defRPr sz="1800">
+                <a:solidFill>
+                  <a:srgbClr val="000000"/>
+                </a:solidFill>
+              </a:defRPr>
+            </a:pPr>
+            <a:r>
+              <a:t>Contrôle de version : Git et GitHub</a:t>
+            </a:r>
+          </a:p>
+          <a:p>
+            <a:pPr>
+              <a:lnSpc>
+                <a:spcPct val="115000"/>
+              </a:lnSpc>
+              <a:spcBef>
+                <a:spcPts val="400"/>
+              </a:spcBef>
+              <a:spcAft>
+                <a:spcPts val="400"/>
+              </a:spcAft>
+              <a:defRPr sz="1800">
+                <a:solidFill>
+                  <a:srgbClr val="000000"/>
+                </a:solidFill>
+              </a:defRPr>
+            </a:pPr>
+            <a:r>
+              <a:t>   - Permet le suivi des modifications et la collaboration d'équipe</a:t>
             </a:r>
           </a:p>
         </p:txBody>
@@ -4295,7 +5018,7 @@
         </p:nvSpPr>
         <p:spPr>
           <a:xfrm>
-            <a:off x="457200" y="457200"/>
+            <a:off x="457200" y="365760"/>
             <a:ext cx="8229600" cy="731520"/>
           </a:xfrm>
           <a:prstGeom prst="rect">
@@ -4317,7 +5040,7 @@
               </a:defRPr>
             </a:pPr>
             <a:r>
-              <a:t>Conclusion</a:t>
+              <a:t>Avantages Principaux du Système</a:t>
             </a:r>
           </a:p>
         </p:txBody>
@@ -4330,8 +5053,8 @@
         </p:nvSpPr>
         <p:spPr>
           <a:xfrm>
-            <a:off x="914400" y="1371600"/>
-            <a:ext cx="7315200" cy="5029200"/>
+            <a:off x="640080" y="1280160"/>
+            <a:ext cx="7863840" cy="5212080"/>
           </a:xfrm>
           <a:prstGeom prst="rect">
             <a:avLst/>
@@ -4345,92 +5068,1196 @@
           <a:lstStyle/>
           <a:p>
             <a:pPr>
-              <a:spcBef>
-                <a:spcPts val="800"/>
-              </a:spcBef>
-              <a:spcAft>
-                <a:spcPts val="800"/>
-              </a:spcAft>
-              <a:defRPr sz="2000">
-                <a:solidFill>
-                  <a:srgbClr val="000000"/>
-                </a:solidFill>
-              </a:defRPr>
-            </a:pPr>
-            <a:r>
-              <a:t>✓ Système complet et fonctionnel</a:t>
-            </a:r>
-          </a:p>
-          <a:p>
-            <a:pPr>
-              <a:spcBef>
-                <a:spcPts val="800"/>
-              </a:spcBef>
-              <a:spcAft>
-                <a:spcPts val="800"/>
-              </a:spcAft>
-              <a:defRPr sz="2000">
-                <a:solidFill>
-                  <a:srgbClr val="000000"/>
-                </a:solidFill>
-              </a:defRPr>
-            </a:pPr>
-            <a:r>
-              <a:t>✓ Code bien organisé et commenté</a:t>
-            </a:r>
-          </a:p>
-          <a:p>
-            <a:pPr>
-              <a:spcBef>
-                <a:spcPts val="800"/>
-              </a:spcBef>
-              <a:spcAft>
-                <a:spcPts val="800"/>
-              </a:spcAft>
-              <a:defRPr sz="2000">
-                <a:solidFill>
-                  <a:srgbClr val="000000"/>
-                </a:solidFill>
-              </a:defRPr>
-            </a:pPr>
-            <a:r>
-              <a:t>✓ Facile à étendre et maintenir</a:t>
-            </a:r>
-          </a:p>
-          <a:p>
-            <a:pPr>
-              <a:spcBef>
-                <a:spcPts val="800"/>
-              </a:spcBef>
-              <a:spcAft>
-                <a:spcPts val="800"/>
-              </a:spcAft>
-              <a:defRPr sz="2000">
-                <a:solidFill>
-                  <a:srgbClr val="000000"/>
-                </a:solidFill>
-              </a:defRPr>
-            </a:pPr>
-            <a:r>
-              <a:t>✓ Prêt pour une utilisation réelle</a:t>
-            </a:r>
-          </a:p>
-          <a:p>
-            <a:pPr>
-              <a:spcBef>
-                <a:spcPts val="800"/>
-              </a:spcBef>
-              <a:spcAft>
-                <a:spcPts val="800"/>
-              </a:spcAft>
-              <a:defRPr sz="2000">
-                <a:solidFill>
-                  <a:srgbClr val="000000"/>
-                </a:solidFill>
-              </a:defRPr>
-            </a:pPr>
-            <a:r>
-              <a:t>✓ Collaboration d'équipe réussie !</a:t>
+              <a:lnSpc>
+                <a:spcPct val="115000"/>
+              </a:lnSpc>
+              <a:spcBef>
+                <a:spcPts val="400"/>
+              </a:spcBef>
+              <a:spcAft>
+                <a:spcPts val="400"/>
+              </a:spcAft>
+              <a:defRPr sz="1800">
+                <a:solidFill>
+                  <a:srgbClr val="000000"/>
+                </a:solidFill>
+              </a:defRPr>
+            </a:pPr>
+            <a:r>
+              <a:t>Interface Simple et Conviviale :</a:t>
+            </a:r>
+          </a:p>
+          <a:p>
+            <a:pPr>
+              <a:lnSpc>
+                <a:spcPct val="115000"/>
+              </a:lnSpc>
+              <a:spcBef>
+                <a:spcPts val="400"/>
+              </a:spcBef>
+              <a:spcAft>
+                <a:spcPts val="400"/>
+              </a:spcAft>
+              <a:defRPr sz="1800">
+                <a:solidFill>
+                  <a:srgbClr val="000000"/>
+                </a:solidFill>
+              </a:defRPr>
+            </a:pPr>
+            <a:r>
+              <a:t>- Menu numéroté facile à naviguer sans connaissances techniques</a:t>
+            </a:r>
+          </a:p>
+          <a:p>
+            <a:pPr>
+              <a:lnSpc>
+                <a:spcPct val="115000"/>
+              </a:lnSpc>
+              <a:spcBef>
+                <a:spcPts val="400"/>
+              </a:spcBef>
+              <a:spcAft>
+                <a:spcPts val="400"/>
+              </a:spcAft>
+              <a:defRPr sz="1800">
+                <a:solidFill>
+                  <a:srgbClr val="000000"/>
+                </a:solidFill>
+              </a:defRPr>
+            </a:pPr>
+          </a:p>
+          <a:p>
+            <a:pPr>
+              <a:lnSpc>
+                <a:spcPct val="115000"/>
+              </a:lnSpc>
+              <a:spcBef>
+                <a:spcPts val="400"/>
+              </a:spcBef>
+              <a:spcAft>
+                <a:spcPts val="400"/>
+              </a:spcAft>
+              <a:defRPr sz="1800">
+                <a:solidFill>
+                  <a:srgbClr val="000000"/>
+                </a:solidFill>
+              </a:defRPr>
+            </a:pPr>
+            <a:r>
+              <a:t>Données Fiables et Validées :</a:t>
+            </a:r>
+          </a:p>
+          <a:p>
+            <a:pPr>
+              <a:lnSpc>
+                <a:spcPct val="115000"/>
+              </a:lnSpc>
+              <a:spcBef>
+                <a:spcPts val="400"/>
+              </a:spcBef>
+              <a:spcAft>
+                <a:spcPts val="400"/>
+              </a:spcAft>
+              <a:defRPr sz="1800">
+                <a:solidFill>
+                  <a:srgbClr val="000000"/>
+                </a:solidFill>
+              </a:defRPr>
+            </a:pPr>
+            <a:r>
+              <a:t>- Tous les champs sont vérifiés avant enregistrement</a:t>
+            </a:r>
+          </a:p>
+          <a:p>
+            <a:pPr>
+              <a:lnSpc>
+                <a:spcPct val="115000"/>
+              </a:lnSpc>
+              <a:spcBef>
+                <a:spcPts val="400"/>
+              </a:spcBef>
+              <a:spcAft>
+                <a:spcPts val="400"/>
+              </a:spcAft>
+              <a:defRPr sz="1800">
+                <a:solidFill>
+                  <a:srgbClr val="000000"/>
+                </a:solidFill>
+              </a:defRPr>
+            </a:pPr>
+          </a:p>
+          <a:p>
+            <a:pPr>
+              <a:lnSpc>
+                <a:spcPct val="115000"/>
+              </a:lnSpc>
+              <a:spcBef>
+                <a:spcPts val="400"/>
+              </a:spcBef>
+              <a:spcAft>
+                <a:spcPts val="400"/>
+              </a:spcAft>
+              <a:defRPr sz="1800">
+                <a:solidFill>
+                  <a:srgbClr val="000000"/>
+                </a:solidFill>
+              </a:defRPr>
+            </a:pPr>
+            <a:r>
+              <a:t>Rapports Détaillés :</a:t>
+            </a:r>
+          </a:p>
+          <a:p>
+            <a:pPr>
+              <a:lnSpc>
+                <a:spcPct val="115000"/>
+              </a:lnSpc>
+              <a:spcBef>
+                <a:spcPts val="400"/>
+              </a:spcBef>
+              <a:spcAft>
+                <a:spcPts val="400"/>
+              </a:spcAft>
+              <a:defRPr sz="1800">
+                <a:solidFill>
+                  <a:srgbClr val="000000"/>
+                </a:solidFill>
+              </a:defRPr>
+            </a:pPr>
+            <a:r>
+              <a:t>- Analyse complète de la production avec plusieurs perspectives</a:t>
+            </a:r>
+          </a:p>
+          <a:p>
+            <a:pPr>
+              <a:lnSpc>
+                <a:spcPct val="115000"/>
+              </a:lnSpc>
+              <a:spcBef>
+                <a:spcPts val="400"/>
+              </a:spcBef>
+              <a:spcAft>
+                <a:spcPts val="400"/>
+              </a:spcAft>
+              <a:defRPr sz="1800">
+                <a:solidFill>
+                  <a:srgbClr val="000000"/>
+                </a:solidFill>
+              </a:defRPr>
+            </a:pPr>
+          </a:p>
+          <a:p>
+            <a:pPr>
+              <a:lnSpc>
+                <a:spcPct val="115000"/>
+              </a:lnSpc>
+              <a:spcBef>
+                <a:spcPts val="400"/>
+              </a:spcBef>
+              <a:spcAft>
+                <a:spcPts val="400"/>
+              </a:spcAft>
+              <a:defRPr sz="1800">
+                <a:solidFill>
+                  <a:srgbClr val="000000"/>
+                </a:solidFill>
+              </a:defRPr>
+            </a:pPr>
+            <a:r>
+              <a:t>Modularité et Extensibilité :</a:t>
+            </a:r>
+          </a:p>
+          <a:p>
+            <a:pPr>
+              <a:lnSpc>
+                <a:spcPct val="115000"/>
+              </a:lnSpc>
+              <a:spcBef>
+                <a:spcPts val="400"/>
+              </a:spcBef>
+              <a:spcAft>
+                <a:spcPts val="400"/>
+              </a:spcAft>
+              <a:defRPr sz="1800">
+                <a:solidFill>
+                  <a:srgbClr val="000000"/>
+                </a:solidFill>
+              </a:defRPr>
+            </a:pPr>
+            <a:r>
+              <a:t>- Code organisé en modules permettant l'ajout de nouvelles fonctionnalités</a:t>
+            </a:r>
+          </a:p>
+          <a:p>
+            <a:pPr>
+              <a:lnSpc>
+                <a:spcPct val="115000"/>
+              </a:lnSpc>
+              <a:spcBef>
+                <a:spcPts val="400"/>
+              </a:spcBef>
+              <a:spcAft>
+                <a:spcPts val="400"/>
+              </a:spcAft>
+              <a:defRPr sz="1800">
+                <a:solidFill>
+                  <a:srgbClr val="000000"/>
+                </a:solidFill>
+              </a:defRPr>
+            </a:pPr>
+          </a:p>
+          <a:p>
+            <a:pPr>
+              <a:lnSpc>
+                <a:spcPct val="115000"/>
+              </a:lnSpc>
+              <a:spcBef>
+                <a:spcPts val="400"/>
+              </a:spcBef>
+              <a:spcAft>
+                <a:spcPts val="400"/>
+              </a:spcAft>
+              <a:defRPr sz="1800">
+                <a:solidFill>
+                  <a:srgbClr val="000000"/>
+                </a:solidFill>
+              </a:defRPr>
+            </a:pPr>
+            <a:r>
+              <a:t>Performance :</a:t>
+            </a:r>
+          </a:p>
+          <a:p>
+            <a:pPr>
+              <a:lnSpc>
+                <a:spcPct val="115000"/>
+              </a:lnSpc>
+              <a:spcBef>
+                <a:spcPts val="400"/>
+              </a:spcBef>
+              <a:spcAft>
+                <a:spcPts val="400"/>
+              </a:spcAft>
+              <a:defRPr sz="1800">
+                <a:solidFill>
+                  <a:srgbClr val="000000"/>
+                </a:solidFill>
+              </a:defRPr>
+            </a:pPr>
+            <a:r>
+              <a:t>- Recherche et calculs très rapides sur les données</a:t>
+            </a:r>
+          </a:p>
+        </p:txBody>
+      </p:sp>
+    </p:spTree>
+  </p:cSld>
+  <p:clrMapOvr>
+    <a:masterClrMapping/>
+  </p:clrMapOvr>
+</p:sld>
+</file>
+
+<file path=ppt/slides/slide17.xml><?xml version="1.0" encoding="utf-8"?>
+<p:sld xmlns:a="http://schemas.openxmlformats.org/drawingml/2006/main" xmlns:p="http://schemas.openxmlformats.org/presentationml/2006/main" xmlns:r="http://schemas.openxmlformats.org/officeDocument/2006/relationships">
+  <p:cSld>
+    <p:bg>
+      <p:bgPr>
+        <a:solidFill>
+          <a:srgbClr val="F5F5F5"/>
+        </a:solidFill>
+        <a:effectLst/>
+      </p:bgPr>
+    </p:bg>
+    <p:spTree>
+      <p:nvGrpSpPr>
+        <p:cNvPr id="1" name=""/>
+        <p:cNvGrpSpPr/>
+        <p:nvPr/>
+      </p:nvGrpSpPr>
+      <p:grpSpPr/>
+      <p:sp>
+        <p:nvSpPr>
+          <p:cNvPr id="2" name="TextBox 1"/>
+          <p:cNvSpPr txBox="1"/>
+          <p:nvPr/>
+        </p:nvSpPr>
+        <p:spPr>
+          <a:xfrm>
+            <a:off x="457200" y="365760"/>
+            <a:ext cx="8229600" cy="731520"/>
+          </a:xfrm>
+          <a:prstGeom prst="rect">
+            <a:avLst/>
+          </a:prstGeom>
+          <a:noFill/>
+        </p:spPr>
+        <p:txBody>
+          <a:bodyPr wrap="none">
+            <a:spAutoFit/>
+          </a:bodyPr>
+          <a:lstStyle/>
+          <a:p>
+            <a:pPr>
+              <a:defRPr sz="4400" b="1">
+                <a:solidFill>
+                  <a:srgbClr val="228B22"/>
+                </a:solidFill>
+              </a:defRPr>
+            </a:pPr>
+            <a:r>
+              <a:t>Limitations Actuelles et Perspectives Futures</a:t>
+            </a:r>
+          </a:p>
+        </p:txBody>
+      </p:sp>
+      <p:sp>
+        <p:nvSpPr>
+          <p:cNvPr id="3" name="TextBox 2"/>
+          <p:cNvSpPr txBox="1"/>
+          <p:nvPr/>
+        </p:nvSpPr>
+        <p:spPr>
+          <a:xfrm>
+            <a:off x="640080" y="1280160"/>
+            <a:ext cx="7863840" cy="5212080"/>
+          </a:xfrm>
+          <a:prstGeom prst="rect">
+            <a:avLst/>
+          </a:prstGeom>
+          <a:noFill/>
+        </p:spPr>
+        <p:txBody>
+          <a:bodyPr wrap="square">
+            <a:spAutoFit/>
+          </a:bodyPr>
+          <a:lstStyle/>
+          <a:p>
+            <a:pPr>
+              <a:lnSpc>
+                <a:spcPct val="115000"/>
+              </a:lnSpc>
+              <a:spcBef>
+                <a:spcPts val="400"/>
+              </a:spcBef>
+              <a:spcAft>
+                <a:spcPts val="400"/>
+              </a:spcAft>
+              <a:defRPr sz="1800">
+                <a:solidFill>
+                  <a:srgbClr val="000000"/>
+                </a:solidFill>
+              </a:defRPr>
+            </a:pPr>
+            <a:r>
+              <a:t>Limitations actuelles :</a:t>
+            </a:r>
+          </a:p>
+          <a:p>
+            <a:pPr>
+              <a:lnSpc>
+                <a:spcPct val="115000"/>
+              </a:lnSpc>
+              <a:spcBef>
+                <a:spcPts val="400"/>
+              </a:spcBef>
+              <a:spcAft>
+                <a:spcPts val="400"/>
+              </a:spcAft>
+              <a:defRPr sz="1800">
+                <a:solidFill>
+                  <a:srgbClr val="000000"/>
+                </a:solidFill>
+              </a:defRPr>
+            </a:pPr>
+            <a:r>
+              <a:t>- Les données ne sont stockées qu'en mémoire (perdues au redémarrage)</a:t>
+            </a:r>
+          </a:p>
+          <a:p>
+            <a:pPr>
+              <a:lnSpc>
+                <a:spcPct val="115000"/>
+              </a:lnSpc>
+              <a:spcBef>
+                <a:spcPts val="400"/>
+              </a:spcBef>
+              <a:spcAft>
+                <a:spcPts val="400"/>
+              </a:spcAft>
+              <a:defRPr sz="1800">
+                <a:solidFill>
+                  <a:srgbClr val="000000"/>
+                </a:solidFill>
+              </a:defRPr>
+            </a:pPr>
+            <a:r>
+              <a:t>- Pas de fonction de suppression ou modification de données</a:t>
+            </a:r>
+          </a:p>
+          <a:p>
+            <a:pPr>
+              <a:lnSpc>
+                <a:spcPct val="115000"/>
+              </a:lnSpc>
+              <a:spcBef>
+                <a:spcPts val="400"/>
+              </a:spcBef>
+              <a:spcAft>
+                <a:spcPts val="400"/>
+              </a:spcAft>
+              <a:defRPr sz="1800">
+                <a:solidFill>
+                  <a:srgbClr val="000000"/>
+                </a:solidFill>
+              </a:defRPr>
+            </a:pPr>
+            <a:r>
+              <a:t>- Pas d'authentification utilisateur</a:t>
+            </a:r>
+          </a:p>
+          <a:p>
+            <a:pPr>
+              <a:lnSpc>
+                <a:spcPct val="115000"/>
+              </a:lnSpc>
+              <a:spcBef>
+                <a:spcPts val="400"/>
+              </a:spcBef>
+              <a:spcAft>
+                <a:spcPts val="400"/>
+              </a:spcAft>
+              <a:defRPr sz="1800">
+                <a:solidFill>
+                  <a:srgbClr val="000000"/>
+                </a:solidFill>
+              </a:defRPr>
+            </a:pPr>
+          </a:p>
+          <a:p>
+            <a:pPr>
+              <a:lnSpc>
+                <a:spcPct val="115000"/>
+              </a:lnSpc>
+              <a:spcBef>
+                <a:spcPts val="400"/>
+              </a:spcBef>
+              <a:spcAft>
+                <a:spcPts val="400"/>
+              </a:spcAft>
+              <a:defRPr sz="1800">
+                <a:solidFill>
+                  <a:srgbClr val="000000"/>
+                </a:solidFill>
+              </a:defRPr>
+            </a:pPr>
+            <a:r>
+              <a:t>Améliorations futures possibles :</a:t>
+            </a:r>
+          </a:p>
+          <a:p>
+            <a:pPr>
+              <a:lnSpc>
+                <a:spcPct val="115000"/>
+              </a:lnSpc>
+              <a:spcBef>
+                <a:spcPts val="400"/>
+              </a:spcBef>
+              <a:spcAft>
+                <a:spcPts val="400"/>
+              </a:spcAft>
+              <a:defRPr sz="1800">
+                <a:solidFill>
+                  <a:srgbClr val="000000"/>
+                </a:solidFill>
+              </a:defRPr>
+            </a:pPr>
+            <a:r>
+              <a:t>- Ajouter une base de données (SQL) pour persistance des données</a:t>
+            </a:r>
+          </a:p>
+          <a:p>
+            <a:pPr>
+              <a:lnSpc>
+                <a:spcPct val="115000"/>
+              </a:lnSpc>
+              <a:spcBef>
+                <a:spcPts val="400"/>
+              </a:spcBef>
+              <a:spcAft>
+                <a:spcPts val="400"/>
+              </a:spcAft>
+              <a:defRPr sz="1800">
+                <a:solidFill>
+                  <a:srgbClr val="000000"/>
+                </a:solidFill>
+              </a:defRPr>
+            </a:pPr>
+            <a:r>
+              <a:t>- Implémenter édition et suppression de producteurs/récoltes</a:t>
+            </a:r>
+          </a:p>
+          <a:p>
+            <a:pPr>
+              <a:lnSpc>
+                <a:spcPct val="115000"/>
+              </a:lnSpc>
+              <a:spcBef>
+                <a:spcPts val="400"/>
+              </a:spcBef>
+              <a:spcAft>
+                <a:spcPts val="400"/>
+              </a:spcAft>
+              <a:defRPr sz="1800">
+                <a:solidFill>
+                  <a:srgbClr val="000000"/>
+                </a:solidFill>
+              </a:defRPr>
+            </a:pPr>
+            <a:r>
+              <a:t>- Ajouter export des rapports en PDF ou Excel</a:t>
+            </a:r>
+          </a:p>
+          <a:p>
+            <a:pPr>
+              <a:lnSpc>
+                <a:spcPct val="115000"/>
+              </a:lnSpc>
+              <a:spcBef>
+                <a:spcPts val="400"/>
+              </a:spcBef>
+              <a:spcAft>
+                <a:spcPts val="400"/>
+              </a:spcAft>
+              <a:defRPr sz="1800">
+                <a:solidFill>
+                  <a:srgbClr val="000000"/>
+                </a:solidFill>
+              </a:defRPr>
+            </a:pPr>
+            <a:r>
+              <a:t>- Implémenter système de sauvegarde/chargement de fichiers</a:t>
+            </a:r>
+          </a:p>
+        </p:txBody>
+      </p:sp>
+    </p:spTree>
+  </p:cSld>
+  <p:clrMapOvr>
+    <a:masterClrMapping/>
+  </p:clrMapOvr>
+</p:sld>
+</file>
+
+<file path=ppt/slides/slide18.xml><?xml version="1.0" encoding="utf-8"?>
+<p:sld xmlns:a="http://schemas.openxmlformats.org/drawingml/2006/main" xmlns:p="http://schemas.openxmlformats.org/presentationml/2006/main" xmlns:r="http://schemas.openxmlformats.org/officeDocument/2006/relationships">
+  <p:cSld>
+    <p:bg>
+      <p:bgPr>
+        <a:solidFill>
+          <a:srgbClr val="F5F5F5"/>
+        </a:solidFill>
+        <a:effectLst/>
+      </p:bgPr>
+    </p:bg>
+    <p:spTree>
+      <p:nvGrpSpPr>
+        <p:cNvPr id="1" name=""/>
+        <p:cNvGrpSpPr/>
+        <p:nvPr/>
+      </p:nvGrpSpPr>
+      <p:grpSpPr/>
+      <p:sp>
+        <p:nvSpPr>
+          <p:cNvPr id="2" name="TextBox 1"/>
+          <p:cNvSpPr txBox="1"/>
+          <p:nvPr/>
+        </p:nvSpPr>
+        <p:spPr>
+          <a:xfrm>
+            <a:off x="457200" y="365760"/>
+            <a:ext cx="8229600" cy="731520"/>
+          </a:xfrm>
+          <a:prstGeom prst="rect">
+            <a:avLst/>
+          </a:prstGeom>
+          <a:noFill/>
+        </p:spPr>
+        <p:txBody>
+          <a:bodyPr wrap="none">
+            <a:spAutoFit/>
+          </a:bodyPr>
+          <a:lstStyle/>
+          <a:p>
+            <a:pPr>
+              <a:defRPr sz="4400" b="1">
+                <a:solidFill>
+                  <a:srgbClr val="228B22"/>
+                </a:solidFill>
+              </a:defRPr>
+            </a:pPr>
+            <a:r>
+              <a:t>Exemple Complet d'Utilisation</a:t>
+            </a:r>
+          </a:p>
+        </p:txBody>
+      </p:sp>
+      <p:sp>
+        <p:nvSpPr>
+          <p:cNvPr id="3" name="TextBox 2"/>
+          <p:cNvSpPr txBox="1"/>
+          <p:nvPr/>
+        </p:nvSpPr>
+        <p:spPr>
+          <a:xfrm>
+            <a:off x="640080" y="1280160"/>
+            <a:ext cx="7863840" cy="5212080"/>
+          </a:xfrm>
+          <a:prstGeom prst="rect">
+            <a:avLst/>
+          </a:prstGeom>
+          <a:noFill/>
+        </p:spPr>
+        <p:txBody>
+          <a:bodyPr wrap="square">
+            <a:spAutoFit/>
+          </a:bodyPr>
+          <a:lstStyle/>
+          <a:p>
+            <a:pPr>
+              <a:lnSpc>
+                <a:spcPct val="115000"/>
+              </a:lnSpc>
+              <a:spcBef>
+                <a:spcPts val="400"/>
+              </a:spcBef>
+              <a:spcAft>
+                <a:spcPts val="400"/>
+              </a:spcAft>
+              <a:defRPr sz="1800">
+                <a:solidFill>
+                  <a:srgbClr val="000000"/>
+                </a:solidFill>
+              </a:defRPr>
+            </a:pPr>
+            <a:r>
+              <a:t>Scénario : Un gestionnaire de coopérative souhaite enregistrer les récoltes</a:t>
+            </a:r>
+          </a:p>
+          <a:p>
+            <a:pPr>
+              <a:lnSpc>
+                <a:spcPct val="115000"/>
+              </a:lnSpc>
+              <a:spcBef>
+                <a:spcPts val="400"/>
+              </a:spcBef>
+              <a:spcAft>
+                <a:spcPts val="400"/>
+              </a:spcAft>
+              <a:defRPr sz="1800">
+                <a:solidFill>
+                  <a:srgbClr val="000000"/>
+                </a:solidFill>
+              </a:defRPr>
+            </a:pPr>
+          </a:p>
+          <a:p>
+            <a:pPr>
+              <a:lnSpc>
+                <a:spcPct val="115000"/>
+              </a:lnSpc>
+              <a:spcBef>
+                <a:spcPts val="400"/>
+              </a:spcBef>
+              <a:spcAft>
+                <a:spcPts val="400"/>
+              </a:spcAft>
+              <a:defRPr sz="1800">
+                <a:solidFill>
+                  <a:srgbClr val="000000"/>
+                </a:solidFill>
+              </a:defRPr>
+            </a:pPr>
+            <a:r>
+              <a:t>Étapes :</a:t>
+            </a:r>
+          </a:p>
+          <a:p>
+            <a:pPr>
+              <a:lnSpc>
+                <a:spcPct val="115000"/>
+              </a:lnSpc>
+              <a:spcBef>
+                <a:spcPts val="400"/>
+              </a:spcBef>
+              <a:spcAft>
+                <a:spcPts val="400"/>
+              </a:spcAft>
+              <a:defRPr sz="1800">
+                <a:solidFill>
+                  <a:srgbClr val="000000"/>
+                </a:solidFill>
+              </a:defRPr>
+            </a:pPr>
+            <a:r>
+              <a:t>1. Lance le programme : python main.py</a:t>
+            </a:r>
+          </a:p>
+          <a:p>
+            <a:pPr>
+              <a:lnSpc>
+                <a:spcPct val="115000"/>
+              </a:lnSpc>
+              <a:spcBef>
+                <a:spcPts val="400"/>
+              </a:spcBef>
+              <a:spcAft>
+                <a:spcPts val="400"/>
+              </a:spcAft>
+              <a:defRPr sz="1800">
+                <a:solidFill>
+                  <a:srgbClr val="000000"/>
+                </a:solidFill>
+              </a:defRPr>
+            </a:pPr>
+            <a:r>
+              <a:t>2. Choisit option 1 pour ajouter le producteur 'Amadou Sow'</a:t>
+            </a:r>
+          </a:p>
+          <a:p>
+            <a:pPr>
+              <a:lnSpc>
+                <a:spcPct val="115000"/>
+              </a:lnSpc>
+              <a:spcBef>
+                <a:spcPts val="400"/>
+              </a:spcBef>
+              <a:spcAft>
+                <a:spcPts val="400"/>
+              </a:spcAft>
+              <a:defRPr sz="1800">
+                <a:solidFill>
+                  <a:srgbClr val="000000"/>
+                </a:solidFill>
+              </a:defRPr>
+            </a:pPr>
+            <a:r>
+              <a:t>3. Choisit option 4 pour enregistrer 100 kg de Riz pour Amadou</a:t>
+            </a:r>
+          </a:p>
+          <a:p>
+            <a:pPr>
+              <a:lnSpc>
+                <a:spcPct val="115000"/>
+              </a:lnSpc>
+              <a:spcBef>
+                <a:spcPts val="400"/>
+              </a:spcBef>
+              <a:spcAft>
+                <a:spcPts val="400"/>
+              </a:spcAft>
+              <a:defRPr sz="1800">
+                <a:solidFill>
+                  <a:srgbClr val="000000"/>
+                </a:solidFill>
+              </a:defRPr>
+            </a:pPr>
+            <a:r>
+              <a:t>4. Choisit option 4 à nouveau pour ajouter 50 kg d'Arachide</a:t>
+            </a:r>
+          </a:p>
+          <a:p>
+            <a:pPr>
+              <a:lnSpc>
+                <a:spcPct val="115000"/>
+              </a:lnSpc>
+              <a:spcBef>
+                <a:spcPts val="400"/>
+              </a:spcBef>
+              <a:spcAft>
+                <a:spcPts val="400"/>
+              </a:spcAft>
+              <a:defRPr sz="1800">
+                <a:solidFill>
+                  <a:srgbClr val="000000"/>
+                </a:solidFill>
+              </a:defRPr>
+            </a:pPr>
+            <a:r>
+              <a:t>5. Choisit option 6 pour voir production totale</a:t>
+            </a:r>
+          </a:p>
+          <a:p>
+            <a:pPr>
+              <a:lnSpc>
+                <a:spcPct val="115000"/>
+              </a:lnSpc>
+              <a:spcBef>
+                <a:spcPts val="400"/>
+              </a:spcBef>
+              <a:spcAft>
+                <a:spcPts val="400"/>
+              </a:spcAft>
+              <a:defRPr sz="1800">
+                <a:solidFill>
+                  <a:srgbClr val="000000"/>
+                </a:solidFill>
+              </a:defRPr>
+            </a:pPr>
+            <a:r>
+              <a:t>6. Choisit option 7 pour voir détail par produit</a:t>
+            </a:r>
+          </a:p>
+          <a:p>
+            <a:pPr>
+              <a:lnSpc>
+                <a:spcPct val="115000"/>
+              </a:lnSpc>
+              <a:spcBef>
+                <a:spcPts val="400"/>
+              </a:spcBef>
+              <a:spcAft>
+                <a:spcPts val="400"/>
+              </a:spcAft>
+              <a:defRPr sz="1800">
+                <a:solidFill>
+                  <a:srgbClr val="000000"/>
+                </a:solidFill>
+              </a:defRPr>
+            </a:pPr>
+            <a:r>
+              <a:t>7. Choisit option 8 pour identifier le meilleur producteur</a:t>
+            </a:r>
+          </a:p>
+        </p:txBody>
+      </p:sp>
+    </p:spTree>
+  </p:cSld>
+  <p:clrMapOvr>
+    <a:masterClrMapping/>
+  </p:clrMapOvr>
+</p:sld>
+</file>
+
+<file path=ppt/slides/slide19.xml><?xml version="1.0" encoding="utf-8"?>
+<p:sld xmlns:a="http://schemas.openxmlformats.org/drawingml/2006/main" xmlns:p="http://schemas.openxmlformats.org/presentationml/2006/main" xmlns:r="http://schemas.openxmlformats.org/officeDocument/2006/relationships">
+  <p:cSld>
+    <p:bg>
+      <p:bgPr>
+        <a:solidFill>
+          <a:srgbClr val="F5F5F5"/>
+        </a:solidFill>
+        <a:effectLst/>
+      </p:bgPr>
+    </p:bg>
+    <p:spTree>
+      <p:nvGrpSpPr>
+        <p:cNvPr id="1" name=""/>
+        <p:cNvGrpSpPr/>
+        <p:nvPr/>
+      </p:nvGrpSpPr>
+      <p:grpSpPr/>
+      <p:sp>
+        <p:nvSpPr>
+          <p:cNvPr id="2" name="TextBox 1"/>
+          <p:cNvSpPr txBox="1"/>
+          <p:nvPr/>
+        </p:nvSpPr>
+        <p:spPr>
+          <a:xfrm>
+            <a:off x="457200" y="365760"/>
+            <a:ext cx="8229600" cy="731520"/>
+          </a:xfrm>
+          <a:prstGeom prst="rect">
+            <a:avLst/>
+          </a:prstGeom>
+          <a:noFill/>
+        </p:spPr>
+        <p:txBody>
+          <a:bodyPr wrap="none">
+            <a:spAutoFit/>
+          </a:bodyPr>
+          <a:lstStyle/>
+          <a:p>
+            <a:pPr>
+              <a:defRPr sz="4400" b="1">
+                <a:solidFill>
+                  <a:srgbClr val="228B22"/>
+                </a:solidFill>
+              </a:defRPr>
+            </a:pPr>
+            <a:r>
+              <a:t>Conclusion</a:t>
+            </a:r>
+          </a:p>
+        </p:txBody>
+      </p:sp>
+      <p:sp>
+        <p:nvSpPr>
+          <p:cNvPr id="3" name="TextBox 2"/>
+          <p:cNvSpPr txBox="1"/>
+          <p:nvPr/>
+        </p:nvSpPr>
+        <p:spPr>
+          <a:xfrm>
+            <a:off x="640080" y="1280160"/>
+            <a:ext cx="7863840" cy="5212080"/>
+          </a:xfrm>
+          <a:prstGeom prst="rect">
+            <a:avLst/>
+          </a:prstGeom>
+          <a:noFill/>
+        </p:spPr>
+        <p:txBody>
+          <a:bodyPr wrap="square">
+            <a:spAutoFit/>
+          </a:bodyPr>
+          <a:lstStyle/>
+          <a:p>
+            <a:pPr>
+              <a:lnSpc>
+                <a:spcPct val="115000"/>
+              </a:lnSpc>
+              <a:spcBef>
+                <a:spcPts val="400"/>
+              </a:spcBef>
+              <a:spcAft>
+                <a:spcPts val="400"/>
+              </a:spcAft>
+              <a:defRPr sz="1800">
+                <a:solidFill>
+                  <a:srgbClr val="000000"/>
+                </a:solidFill>
+              </a:defRPr>
+            </a:pPr>
+            <a:r>
+              <a:t>AGRI-SEN est un système complet et fonctionnel pour la gestion des coopératives</a:t>
+            </a:r>
+          </a:p>
+          <a:p>
+            <a:pPr>
+              <a:lnSpc>
+                <a:spcPct val="115000"/>
+              </a:lnSpc>
+              <a:spcBef>
+                <a:spcPts val="400"/>
+              </a:spcBef>
+              <a:spcAft>
+                <a:spcPts val="400"/>
+              </a:spcAft>
+              <a:defRPr sz="1800">
+                <a:solidFill>
+                  <a:srgbClr val="000000"/>
+                </a:solidFill>
+              </a:defRPr>
+            </a:pPr>
+            <a:r>
+              <a:t>agricoles. Il démontre une architecture logicielle bien pensée avec une séparation</a:t>
+            </a:r>
+          </a:p>
+          <a:p>
+            <a:pPr>
+              <a:lnSpc>
+                <a:spcPct val="115000"/>
+              </a:lnSpc>
+              <a:spcBef>
+                <a:spcPts val="400"/>
+              </a:spcBef>
+              <a:spcAft>
+                <a:spcPts val="400"/>
+              </a:spcAft>
+              <a:defRPr sz="1800">
+                <a:solidFill>
+                  <a:srgbClr val="000000"/>
+                </a:solidFill>
+              </a:defRPr>
+            </a:pPr>
+            <a:r>
+              <a:t>claire des responsabilités.</a:t>
+            </a:r>
+          </a:p>
+          <a:p>
+            <a:pPr>
+              <a:lnSpc>
+                <a:spcPct val="115000"/>
+              </a:lnSpc>
+              <a:spcBef>
+                <a:spcPts val="400"/>
+              </a:spcBef>
+              <a:spcAft>
+                <a:spcPts val="400"/>
+              </a:spcAft>
+              <a:defRPr sz="1800">
+                <a:solidFill>
+                  <a:srgbClr val="000000"/>
+                </a:solidFill>
+              </a:defRPr>
+            </a:pPr>
+          </a:p>
+          <a:p>
+            <a:pPr>
+              <a:lnSpc>
+                <a:spcPct val="115000"/>
+              </a:lnSpc>
+              <a:spcBef>
+                <a:spcPts val="400"/>
+              </a:spcBef>
+              <a:spcAft>
+                <a:spcPts val="400"/>
+              </a:spcAft>
+              <a:defRPr sz="1800">
+                <a:solidFill>
+                  <a:srgbClr val="000000"/>
+                </a:solidFill>
+              </a:defRPr>
+            </a:pPr>
+            <a:r>
+              <a:t>Le code est :</a:t>
+            </a:r>
+          </a:p>
+          <a:p>
+            <a:pPr>
+              <a:lnSpc>
+                <a:spcPct val="115000"/>
+              </a:lnSpc>
+              <a:spcBef>
+                <a:spcPts val="400"/>
+              </a:spcBef>
+              <a:spcAft>
+                <a:spcPts val="400"/>
+              </a:spcAft>
+              <a:defRPr sz="1800">
+                <a:solidFill>
+                  <a:srgbClr val="000000"/>
+                </a:solidFill>
+              </a:defRPr>
+            </a:pPr>
+            <a:r>
+              <a:t>- Bien organisé en modules indépendants</a:t>
+            </a:r>
+          </a:p>
+          <a:p>
+            <a:pPr>
+              <a:lnSpc>
+                <a:spcPct val="115000"/>
+              </a:lnSpc>
+              <a:spcBef>
+                <a:spcPts val="400"/>
+              </a:spcBef>
+              <a:spcAft>
+                <a:spcPts val="400"/>
+              </a:spcAft>
+              <a:defRPr sz="1800">
+                <a:solidFill>
+                  <a:srgbClr val="000000"/>
+                </a:solidFill>
+              </a:defRPr>
+            </a:pPr>
+            <a:r>
+              <a:t>- Bien commenté et facile à comprendre</a:t>
+            </a:r>
+          </a:p>
+          <a:p>
+            <a:pPr>
+              <a:lnSpc>
+                <a:spcPct val="115000"/>
+              </a:lnSpc>
+              <a:spcBef>
+                <a:spcPts val="400"/>
+              </a:spcBef>
+              <a:spcAft>
+                <a:spcPts val="400"/>
+              </a:spcAft>
+              <a:defRPr sz="1800">
+                <a:solidFill>
+                  <a:srgbClr val="000000"/>
+                </a:solidFill>
+              </a:defRPr>
+            </a:pPr>
+            <a:r>
+              <a:t>- Facile à maintenir et à étendre</a:t>
+            </a:r>
+          </a:p>
+          <a:p>
+            <a:pPr>
+              <a:lnSpc>
+                <a:spcPct val="115000"/>
+              </a:lnSpc>
+              <a:spcBef>
+                <a:spcPts val="400"/>
+              </a:spcBef>
+              <a:spcAft>
+                <a:spcPts val="400"/>
+              </a:spcAft>
+              <a:defRPr sz="1800">
+                <a:solidFill>
+                  <a:srgbClr val="000000"/>
+                </a:solidFill>
+              </a:defRPr>
+            </a:pPr>
+            <a:r>
+              <a:t>- Prêt pour utilisation en environnement réel</a:t>
+            </a:r>
+          </a:p>
+          <a:p>
+            <a:pPr>
+              <a:lnSpc>
+                <a:spcPct val="115000"/>
+              </a:lnSpc>
+              <a:spcBef>
+                <a:spcPts val="400"/>
+              </a:spcBef>
+              <a:spcAft>
+                <a:spcPts val="400"/>
+              </a:spcAft>
+              <a:defRPr sz="1800">
+                <a:solidFill>
+                  <a:srgbClr val="000000"/>
+                </a:solidFill>
+              </a:defRPr>
+            </a:pPr>
+          </a:p>
+          <a:p>
+            <a:pPr>
+              <a:lnSpc>
+                <a:spcPct val="115000"/>
+              </a:lnSpc>
+              <a:spcBef>
+                <a:spcPts val="400"/>
+              </a:spcBef>
+              <a:spcAft>
+                <a:spcPts val="400"/>
+              </a:spcAft>
+              <a:defRPr sz="1800">
+                <a:solidFill>
+                  <a:srgbClr val="000000"/>
+                </a:solidFill>
+              </a:defRPr>
+            </a:pPr>
+            <a:r>
+              <a:t>Ce projet représente une collaboration d'équipe réussie dans le développement</a:t>
+            </a:r>
+          </a:p>
+          <a:p>
+            <a:pPr>
+              <a:lnSpc>
+                <a:spcPct val="115000"/>
+              </a:lnSpc>
+              <a:spcBef>
+                <a:spcPts val="400"/>
+              </a:spcBef>
+              <a:spcAft>
+                <a:spcPts val="400"/>
+              </a:spcAft>
+              <a:defRPr sz="1800">
+                <a:solidFill>
+                  <a:srgbClr val="000000"/>
+                </a:solidFill>
+              </a:defRPr>
+            </a:pPr>
+            <a:r>
+              <a:t>logiciel collaboratif.</a:t>
             </a:r>
           </a:p>
         </p:txBody>
@@ -4469,7 +6296,7 @@
         </p:nvSpPr>
         <p:spPr>
           <a:xfrm>
-            <a:off x="457200" y="457200"/>
+            <a:off x="457200" y="365760"/>
             <a:ext cx="8229600" cy="731520"/>
           </a:xfrm>
           <a:prstGeom prst="rect">
@@ -4491,7 +6318,7 @@
               </a:defRPr>
             </a:pPr>
             <a:r>
-              <a:t>Vue d'ensemble du Projet</a:t>
+              <a:t>Introduction du Projet</a:t>
             </a:r>
           </a:p>
         </p:txBody>
@@ -4504,8 +6331,8 @@
         </p:nvSpPr>
         <p:spPr>
           <a:xfrm>
-            <a:off x="914400" y="1371600"/>
-            <a:ext cx="7315200" cy="5029200"/>
+            <a:off x="640080" y="1280160"/>
+            <a:ext cx="7863840" cy="5212080"/>
           </a:xfrm>
           <a:prstGeom prst="rect">
             <a:avLst/>
@@ -4519,92 +6346,146 @@
           <a:lstStyle/>
           <a:p>
             <a:pPr>
-              <a:spcBef>
-                <a:spcPts val="800"/>
-              </a:spcBef>
-              <a:spcAft>
-                <a:spcPts val="800"/>
-              </a:spcAft>
-              <a:defRPr sz="2000">
-                <a:solidFill>
-                  <a:srgbClr val="000000"/>
-                </a:solidFill>
-              </a:defRPr>
-            </a:pPr>
-            <a:r>
-              <a:t>✓ Système de gestion pour une coopérative agricole sénégalaise</a:t>
-            </a:r>
-          </a:p>
-          <a:p>
-            <a:pPr>
-              <a:spcBef>
-                <a:spcPts val="800"/>
-              </a:spcBef>
-              <a:spcAft>
-                <a:spcPts val="800"/>
-              </a:spcAft>
-              <a:defRPr sz="2000">
-                <a:solidFill>
-                  <a:srgbClr val="000000"/>
-                </a:solidFill>
-              </a:defRPr>
-            </a:pPr>
-            <a:r>
-              <a:t>✓ Gestion des producteurs et de leurs récoltes</a:t>
-            </a:r>
-          </a:p>
-          <a:p>
-            <a:pPr>
-              <a:spcBef>
-                <a:spcPts val="800"/>
-              </a:spcBef>
-              <a:spcAft>
-                <a:spcPts val="800"/>
-              </a:spcAft>
-              <a:defRPr sz="2000">
-                <a:solidFill>
-                  <a:srgbClr val="000000"/>
-                </a:solidFill>
-              </a:defRPr>
-            </a:pPr>
-            <a:r>
-              <a:t>✓ Calcul des statistiques de production</a:t>
-            </a:r>
-          </a:p>
-          <a:p>
-            <a:pPr>
-              <a:spcBef>
-                <a:spcPts val="800"/>
-              </a:spcBef>
-              <a:spcAft>
-                <a:spcPts val="800"/>
-              </a:spcAft>
-              <a:defRPr sz="2000">
-                <a:solidFill>
-                  <a:srgbClr val="000000"/>
-                </a:solidFill>
-              </a:defRPr>
-            </a:pPr>
-            <a:r>
-              <a:t>✓ Interface interactive avec menu utilisateur</a:t>
-            </a:r>
-          </a:p>
-          <a:p>
-            <a:pPr>
-              <a:spcBef>
-                <a:spcPts val="800"/>
-              </a:spcBef>
-              <a:spcAft>
-                <a:spcPts val="800"/>
-              </a:spcAft>
-              <a:defRPr sz="2000">
-                <a:solidFill>
-                  <a:srgbClr val="000000"/>
-                </a:solidFill>
-              </a:defRPr>
-            </a:pPr>
-            <a:r>
-              <a:t>✓ Développé en Python par 5 membres d'équipe</a:t>
+              <a:lnSpc>
+                <a:spcPct val="115000"/>
+              </a:lnSpc>
+              <a:spcBef>
+                <a:spcPts val="400"/>
+              </a:spcBef>
+              <a:spcAft>
+                <a:spcPts val="400"/>
+              </a:spcAft>
+              <a:defRPr sz="1800">
+                <a:solidFill>
+                  <a:srgbClr val="000000"/>
+                </a:solidFill>
+              </a:defRPr>
+            </a:pPr>
+            <a:r>
+              <a:t>AGRI-SEN est un système informatique conçu pour gérer les opérations d'une</a:t>
+            </a:r>
+          </a:p>
+          <a:p>
+            <a:pPr>
+              <a:lnSpc>
+                <a:spcPct val="115000"/>
+              </a:lnSpc>
+              <a:spcBef>
+                <a:spcPts val="400"/>
+              </a:spcBef>
+              <a:spcAft>
+                <a:spcPts val="400"/>
+              </a:spcAft>
+              <a:defRPr sz="1800">
+                <a:solidFill>
+                  <a:srgbClr val="000000"/>
+                </a:solidFill>
+              </a:defRPr>
+            </a:pPr>
+            <a:r>
+              <a:t>coopérative agricole. Ce système permet de centraliser et d'analyser les données</a:t>
+            </a:r>
+          </a:p>
+          <a:p>
+            <a:pPr>
+              <a:lnSpc>
+                <a:spcPct val="115000"/>
+              </a:lnSpc>
+              <a:spcBef>
+                <a:spcPts val="400"/>
+              </a:spcBef>
+              <a:spcAft>
+                <a:spcPts val="400"/>
+              </a:spcAft>
+              <a:defRPr sz="1800">
+                <a:solidFill>
+                  <a:srgbClr val="000000"/>
+                </a:solidFill>
+              </a:defRPr>
+            </a:pPr>
+            <a:r>
+              <a:t>concernant les producteurs et leurs récoltes.</a:t>
+            </a:r>
+          </a:p>
+          <a:p>
+            <a:pPr>
+              <a:lnSpc>
+                <a:spcPct val="115000"/>
+              </a:lnSpc>
+              <a:spcBef>
+                <a:spcPts val="400"/>
+              </a:spcBef>
+              <a:spcAft>
+                <a:spcPts val="400"/>
+              </a:spcAft>
+              <a:defRPr sz="1800">
+                <a:solidFill>
+                  <a:srgbClr val="000000"/>
+                </a:solidFill>
+              </a:defRPr>
+            </a:pPr>
+          </a:p>
+          <a:p>
+            <a:pPr>
+              <a:lnSpc>
+                <a:spcPct val="115000"/>
+              </a:lnSpc>
+              <a:spcBef>
+                <a:spcPts val="400"/>
+              </a:spcBef>
+              <a:spcAft>
+                <a:spcPts val="400"/>
+              </a:spcAft>
+              <a:defRPr sz="1800">
+                <a:solidFill>
+                  <a:srgbClr val="000000"/>
+                </a:solidFill>
+              </a:defRPr>
+            </a:pPr>
+            <a:r>
+              <a:t>Le projet a été développé par 5 développeurs travaillant de manière collaborative</a:t>
+            </a:r>
+          </a:p>
+          <a:p>
+            <a:pPr>
+              <a:lnSpc>
+                <a:spcPct val="115000"/>
+              </a:lnSpc>
+              <a:spcBef>
+                <a:spcPts val="400"/>
+              </a:spcBef>
+              <a:spcAft>
+                <a:spcPts val="400"/>
+              </a:spcAft>
+              <a:defRPr sz="1800">
+                <a:solidFill>
+                  <a:srgbClr val="000000"/>
+                </a:solidFill>
+              </a:defRPr>
+            </a:pPr>
+            <a:r>
+              <a:t>en Python, avec une architecture modulaire où chaque membre s'occupe d'une partie</a:t>
+            </a:r>
+          </a:p>
+          <a:p>
+            <a:pPr>
+              <a:lnSpc>
+                <a:spcPct val="115000"/>
+              </a:lnSpc>
+              <a:spcBef>
+                <a:spcPts val="400"/>
+              </a:spcBef>
+              <a:spcAft>
+                <a:spcPts val="400"/>
+              </a:spcAft>
+              <a:defRPr sz="1800">
+                <a:solidFill>
+                  <a:srgbClr val="000000"/>
+                </a:solidFill>
+              </a:defRPr>
+            </a:pPr>
+            <a:r>
+              <a:t>spécifique du système.</a:t>
             </a:r>
           </a:p>
         </p:txBody>
@@ -4643,7 +6524,7 @@
         </p:nvSpPr>
         <p:spPr>
           <a:xfrm>
-            <a:off x="457200" y="457200"/>
+            <a:off x="457200" y="365760"/>
             <a:ext cx="8229600" cy="731520"/>
           </a:xfrm>
           <a:prstGeom prst="rect">
@@ -4678,8 +6559,8 @@
         </p:nvSpPr>
         <p:spPr>
           <a:xfrm>
-            <a:off x="914400" y="1371600"/>
-            <a:ext cx="7315200" cy="5029200"/>
+            <a:off x="640080" y="1280160"/>
+            <a:ext cx="7863840" cy="5212080"/>
           </a:xfrm>
           <a:prstGeom prst="rect">
             <a:avLst/>
@@ -4693,92 +6574,224 @@
           <a:lstStyle/>
           <a:p>
             <a:pPr>
-              <a:spcBef>
-                <a:spcPts val="800"/>
-              </a:spcBef>
-              <a:spcAft>
-                <a:spcPts val="800"/>
-              </a:spcAft>
-              <a:defRPr sz="2000">
-                <a:solidFill>
-                  <a:srgbClr val="000000"/>
-                </a:solidFill>
-              </a:defRPr>
-            </a:pPr>
-            <a:r>
-              <a:t>• Centraliser les informations sur les producteurs</a:t>
-            </a:r>
-          </a:p>
-          <a:p>
-            <a:pPr>
-              <a:spcBef>
-                <a:spcPts val="800"/>
-              </a:spcBef>
-              <a:spcAft>
-                <a:spcPts val="800"/>
-              </a:spcAft>
-              <a:defRPr sz="2000">
-                <a:solidFill>
-                  <a:srgbClr val="000000"/>
-                </a:solidFill>
-              </a:defRPr>
-            </a:pPr>
-            <a:r>
-              <a:t>• Enregistrer et suivre les récoltes par produit</a:t>
-            </a:r>
-          </a:p>
-          <a:p>
-            <a:pPr>
-              <a:spcBef>
-                <a:spcPts val="800"/>
-              </a:spcBef>
-              <a:spcAft>
-                <a:spcPts val="800"/>
-              </a:spcAft>
-              <a:defRPr sz="2000">
-                <a:solidFill>
-                  <a:srgbClr val="000000"/>
-                </a:solidFill>
-              </a:defRPr>
-            </a:pPr>
-            <a:r>
-              <a:t>• Analyser la production totale et par produit</a:t>
-            </a:r>
-          </a:p>
-          <a:p>
-            <a:pPr>
-              <a:spcBef>
-                <a:spcPts val="800"/>
-              </a:spcBef>
-              <a:spcAft>
-                <a:spcPts val="800"/>
-              </a:spcAft>
-              <a:defRPr sz="2000">
-                <a:solidFill>
-                  <a:srgbClr val="000000"/>
-                </a:solidFill>
-              </a:defRPr>
-            </a:pPr>
-            <a:r>
-              <a:t>• Identifier le meilleur producteur</a:t>
-            </a:r>
-          </a:p>
-          <a:p>
-            <a:pPr>
-              <a:spcBef>
-                <a:spcPts val="800"/>
-              </a:spcBef>
-              <a:spcAft>
-                <a:spcPts val="800"/>
-              </a:spcAft>
-              <a:defRPr sz="2000">
-                <a:solidFill>
-                  <a:srgbClr val="000000"/>
-                </a:solidFill>
-              </a:defRPr>
-            </a:pPr>
-            <a:r>
-              <a:t>• Calculer les moyennes de production</a:t>
+              <a:lnSpc>
+                <a:spcPct val="115000"/>
+              </a:lnSpc>
+              <a:spcBef>
+                <a:spcPts val="400"/>
+              </a:spcBef>
+              <a:spcAft>
+                <a:spcPts val="400"/>
+              </a:spcAft>
+              <a:defRPr sz="1800">
+                <a:solidFill>
+                  <a:srgbClr val="000000"/>
+                </a:solidFill>
+              </a:defRPr>
+            </a:pPr>
+            <a:r>
+              <a:t>1. Centraliser les informations sur tous les producteurs de la coopérative</a:t>
+            </a:r>
+          </a:p>
+          <a:p>
+            <a:pPr>
+              <a:lnSpc>
+                <a:spcPct val="115000"/>
+              </a:lnSpc>
+              <a:spcBef>
+                <a:spcPts val="400"/>
+              </a:spcBef>
+              <a:spcAft>
+                <a:spcPts val="400"/>
+              </a:spcAft>
+              <a:defRPr sz="1800">
+                <a:solidFill>
+                  <a:srgbClr val="000000"/>
+                </a:solidFill>
+              </a:defRPr>
+            </a:pPr>
+            <a:r>
+              <a:t>   dans une base de données accessible et organisée.</a:t>
+            </a:r>
+          </a:p>
+          <a:p>
+            <a:pPr>
+              <a:lnSpc>
+                <a:spcPct val="115000"/>
+              </a:lnSpc>
+              <a:spcBef>
+                <a:spcPts val="400"/>
+              </a:spcBef>
+              <a:spcAft>
+                <a:spcPts val="400"/>
+              </a:spcAft>
+              <a:defRPr sz="1800">
+                <a:solidFill>
+                  <a:srgbClr val="000000"/>
+                </a:solidFill>
+              </a:defRPr>
+            </a:pPr>
+          </a:p>
+          <a:p>
+            <a:pPr>
+              <a:lnSpc>
+                <a:spcPct val="115000"/>
+              </a:lnSpc>
+              <a:spcBef>
+                <a:spcPts val="400"/>
+              </a:spcBef>
+              <a:spcAft>
+                <a:spcPts val="400"/>
+              </a:spcAft>
+              <a:defRPr sz="1800">
+                <a:solidFill>
+                  <a:srgbClr val="000000"/>
+                </a:solidFill>
+              </a:defRPr>
+            </a:pPr>
+            <a:r>
+              <a:t>2. Permettre l'enregistrement détaillé de chaque récolte avec validation</a:t>
+            </a:r>
+          </a:p>
+          <a:p>
+            <a:pPr>
+              <a:lnSpc>
+                <a:spcPct val="115000"/>
+              </a:lnSpc>
+              <a:spcBef>
+                <a:spcPts val="400"/>
+              </a:spcBef>
+              <a:spcAft>
+                <a:spcPts val="400"/>
+              </a:spcAft>
+              <a:defRPr sz="1800">
+                <a:solidFill>
+                  <a:srgbClr val="000000"/>
+                </a:solidFill>
+              </a:defRPr>
+            </a:pPr>
+            <a:r>
+              <a:t>   des données pour assurer la qualité.</a:t>
+            </a:r>
+          </a:p>
+          <a:p>
+            <a:pPr>
+              <a:lnSpc>
+                <a:spcPct val="115000"/>
+              </a:lnSpc>
+              <a:spcBef>
+                <a:spcPts val="400"/>
+              </a:spcBef>
+              <a:spcAft>
+                <a:spcPts val="400"/>
+              </a:spcAft>
+              <a:defRPr sz="1800">
+                <a:solidFill>
+                  <a:srgbClr val="000000"/>
+                </a:solidFill>
+              </a:defRPr>
+            </a:pPr>
+          </a:p>
+          <a:p>
+            <a:pPr>
+              <a:lnSpc>
+                <a:spcPct val="115000"/>
+              </a:lnSpc>
+              <a:spcBef>
+                <a:spcPts val="400"/>
+              </a:spcBef>
+              <a:spcAft>
+                <a:spcPts val="400"/>
+              </a:spcAft>
+              <a:defRPr sz="1800">
+                <a:solidFill>
+                  <a:srgbClr val="000000"/>
+                </a:solidFill>
+              </a:defRPr>
+            </a:pPr>
+            <a:r>
+              <a:t>3. Générer des rapports et statistiques de production pour analyser</a:t>
+            </a:r>
+          </a:p>
+          <a:p>
+            <a:pPr>
+              <a:lnSpc>
+                <a:spcPct val="115000"/>
+              </a:lnSpc>
+              <a:spcBef>
+                <a:spcPts val="400"/>
+              </a:spcBef>
+              <a:spcAft>
+                <a:spcPts val="400"/>
+              </a:spcAft>
+              <a:defRPr sz="1800">
+                <a:solidFill>
+                  <a:srgbClr val="000000"/>
+                </a:solidFill>
+              </a:defRPr>
+            </a:pPr>
+            <a:r>
+              <a:t>   la performance de la coopérative.</a:t>
+            </a:r>
+          </a:p>
+          <a:p>
+            <a:pPr>
+              <a:lnSpc>
+                <a:spcPct val="115000"/>
+              </a:lnSpc>
+              <a:spcBef>
+                <a:spcPts val="400"/>
+              </a:spcBef>
+              <a:spcAft>
+                <a:spcPts val="400"/>
+              </a:spcAft>
+              <a:defRPr sz="1800">
+                <a:solidFill>
+                  <a:srgbClr val="000000"/>
+                </a:solidFill>
+              </a:defRPr>
+            </a:pPr>
+          </a:p>
+          <a:p>
+            <a:pPr>
+              <a:lnSpc>
+                <a:spcPct val="115000"/>
+              </a:lnSpc>
+              <a:spcBef>
+                <a:spcPts val="400"/>
+              </a:spcBef>
+              <a:spcAft>
+                <a:spcPts val="400"/>
+              </a:spcAft>
+              <a:defRPr sz="1800">
+                <a:solidFill>
+                  <a:srgbClr val="000000"/>
+                </a:solidFill>
+              </a:defRPr>
+            </a:pPr>
+            <a:r>
+              <a:t>4. Identifier les producteurs les plus performants et calculer les</a:t>
+            </a:r>
+          </a:p>
+          <a:p>
+            <a:pPr>
+              <a:lnSpc>
+                <a:spcPct val="115000"/>
+              </a:lnSpc>
+              <a:spcBef>
+                <a:spcPts val="400"/>
+              </a:spcBef>
+              <a:spcAft>
+                <a:spcPts val="400"/>
+              </a:spcAft>
+              <a:defRPr sz="1800">
+                <a:solidFill>
+                  <a:srgbClr val="000000"/>
+                </a:solidFill>
+              </a:defRPr>
+            </a:pPr>
+            <a:r>
+              <a:t>   moyennes de production pour optimiser la gestion.</a:t>
             </a:r>
           </a:p>
         </p:txBody>
@@ -4817,7 +6830,7 @@
         </p:nvSpPr>
         <p:spPr>
           <a:xfrm>
-            <a:off x="457200" y="457200"/>
+            <a:off x="457200" y="365760"/>
             <a:ext cx="8229600" cy="731520"/>
           </a:xfrm>
           <a:prstGeom prst="rect">
@@ -4839,7 +6852,7 @@
               </a:defRPr>
             </a:pPr>
             <a:r>
-              <a:t>Architecture du Projet - Membre 1</a:t>
+              <a:t>Architecture Générale du Système</a:t>
             </a:r>
           </a:p>
         </p:txBody>
@@ -4852,8 +6865,8 @@
         </p:nvSpPr>
         <p:spPr>
           <a:xfrm>
-            <a:off x="914400" y="1371600"/>
-            <a:ext cx="7315200" cy="5029200"/>
+            <a:off x="640080" y="1280160"/>
+            <a:ext cx="7863840" cy="5212080"/>
           </a:xfrm>
           <a:prstGeom prst="rect">
             <a:avLst/>
@@ -4867,92 +6880,167 @@
           <a:lstStyle/>
           <a:p>
             <a:pPr>
-              <a:spcBef>
-                <a:spcPts val="800"/>
-              </a:spcBef>
-              <a:spcAft>
-                <a:spcPts val="800"/>
-              </a:spcAft>
-              <a:defRPr sz="2000">
-                <a:solidFill>
-                  <a:srgbClr val="000000"/>
-                </a:solidFill>
-              </a:defRPr>
-            </a:pPr>
-            <a:r>
-              <a:t>📁 membre1.py : Gestion des Producteurs</a:t>
-            </a:r>
-          </a:p>
-          <a:p>
-            <a:pPr>
-              <a:spcBef>
-                <a:spcPts val="800"/>
-              </a:spcBef>
-              <a:spcAft>
-                <a:spcPts val="800"/>
-              </a:spcAft>
-              <a:defRPr sz="2000">
-                <a:solidFill>
-                  <a:srgbClr val="000000"/>
-                </a:solidFill>
-              </a:defRPr>
-            </a:pPr>
-            <a:r>
-              <a:t>   • Liste globale 'producteurs'</a:t>
-            </a:r>
-          </a:p>
-          <a:p>
-            <a:pPr>
-              <a:spcBef>
-                <a:spcPts val="800"/>
-              </a:spcBef>
-              <a:spcAft>
-                <a:spcPts val="800"/>
-              </a:spcAft>
-              <a:defRPr sz="2000">
-                <a:solidFill>
-                  <a:srgbClr val="000000"/>
-                </a:solidFill>
-              </a:defRPr>
-            </a:pPr>
-            <a:r>
-              <a:t>   • ajouter_producteur() - ajoute un nouveau producteur</a:t>
-            </a:r>
-          </a:p>
-          <a:p>
-            <a:pPr>
-              <a:spcBef>
-                <a:spcPts val="800"/>
-              </a:spcBef>
-              <a:spcAft>
-                <a:spcPts val="800"/>
-              </a:spcAft>
-              <a:defRPr sz="2000">
-                <a:solidFill>
-                  <a:srgbClr val="000000"/>
-                </a:solidFill>
-              </a:defRPr>
-            </a:pPr>
-            <a:r>
-              <a:t>   • afficher_producteurs() - liste tous les producteurs</a:t>
-            </a:r>
-          </a:p>
-          <a:p>
-            <a:pPr>
-              <a:spcBef>
-                <a:spcPts val="800"/>
-              </a:spcBef>
-              <a:spcAft>
-                <a:spcPts val="800"/>
-              </a:spcAft>
-              <a:defRPr sz="2000">
-                <a:solidFill>
-                  <a:srgbClr val="000000"/>
-                </a:solidFill>
-              </a:defRPr>
-            </a:pPr>
-            <a:r>
-              <a:t>   • rechercher_producteur(nom) - recherche par nom</a:t>
+              <a:lnSpc>
+                <a:spcPct val="115000"/>
+              </a:lnSpc>
+              <a:spcBef>
+                <a:spcPts val="400"/>
+              </a:spcBef>
+              <a:spcAft>
+                <a:spcPts val="400"/>
+              </a:spcAft>
+              <a:defRPr sz="1800">
+                <a:solidFill>
+                  <a:srgbClr val="000000"/>
+                </a:solidFill>
+              </a:defRPr>
+            </a:pPr>
+            <a:r>
+              <a:t>Le système est divisé en 5 modules Python, chacun responsable d'une fonction</a:t>
+            </a:r>
+          </a:p>
+          <a:p>
+            <a:pPr>
+              <a:lnSpc>
+                <a:spcPct val="115000"/>
+              </a:lnSpc>
+              <a:spcBef>
+                <a:spcPts val="400"/>
+              </a:spcBef>
+              <a:spcAft>
+                <a:spcPts val="400"/>
+              </a:spcAft>
+              <a:defRPr sz="1800">
+                <a:solidFill>
+                  <a:srgbClr val="000000"/>
+                </a:solidFill>
+              </a:defRPr>
+            </a:pPr>
+            <a:r>
+              <a:t>spécifique :</a:t>
+            </a:r>
+          </a:p>
+          <a:p>
+            <a:pPr>
+              <a:lnSpc>
+                <a:spcPct val="115000"/>
+              </a:lnSpc>
+              <a:spcBef>
+                <a:spcPts val="400"/>
+              </a:spcBef>
+              <a:spcAft>
+                <a:spcPts val="400"/>
+              </a:spcAft>
+              <a:defRPr sz="1800">
+                <a:solidFill>
+                  <a:srgbClr val="000000"/>
+                </a:solidFill>
+              </a:defRPr>
+            </a:pPr>
+          </a:p>
+          <a:p>
+            <a:pPr>
+              <a:lnSpc>
+                <a:spcPct val="115000"/>
+              </a:lnSpc>
+              <a:spcBef>
+                <a:spcPts val="400"/>
+              </a:spcBef>
+              <a:spcAft>
+                <a:spcPts val="400"/>
+              </a:spcAft>
+              <a:defRPr sz="1800">
+                <a:solidFill>
+                  <a:srgbClr val="000000"/>
+                </a:solidFill>
+              </a:defRPr>
+            </a:pPr>
+            <a:r>
+              <a:t>Module 1 (membre1.py): Gestion des producteurs</a:t>
+            </a:r>
+          </a:p>
+          <a:p>
+            <a:pPr>
+              <a:lnSpc>
+                <a:spcPct val="115000"/>
+              </a:lnSpc>
+              <a:spcBef>
+                <a:spcPts val="400"/>
+              </a:spcBef>
+              <a:spcAft>
+                <a:spcPts val="400"/>
+              </a:spcAft>
+              <a:defRPr sz="1800">
+                <a:solidFill>
+                  <a:srgbClr val="000000"/>
+                </a:solidFill>
+              </a:defRPr>
+            </a:pPr>
+            <a:r>
+              <a:t>Module 2 (membre2.py): Gestion des récoltes</a:t>
+            </a:r>
+          </a:p>
+          <a:p>
+            <a:pPr>
+              <a:lnSpc>
+                <a:spcPct val="115000"/>
+              </a:lnSpc>
+              <a:spcBef>
+                <a:spcPts val="400"/>
+              </a:spcBef>
+              <a:spcAft>
+                <a:spcPts val="400"/>
+              </a:spcAft>
+              <a:defRPr sz="1800">
+                <a:solidFill>
+                  <a:srgbClr val="000000"/>
+                </a:solidFill>
+              </a:defRPr>
+            </a:pPr>
+            <a:r>
+              <a:t>Module 3 (Membre3.py): Statistiques de production</a:t>
+            </a:r>
+          </a:p>
+          <a:p>
+            <a:pPr>
+              <a:lnSpc>
+                <a:spcPct val="115000"/>
+              </a:lnSpc>
+              <a:spcBef>
+                <a:spcPts val="400"/>
+              </a:spcBef>
+              <a:spcAft>
+                <a:spcPts val="400"/>
+              </a:spcAft>
+              <a:defRPr sz="1800">
+                <a:solidFill>
+                  <a:srgbClr val="000000"/>
+                </a:solidFill>
+              </a:defRPr>
+            </a:pPr>
+            <a:r>
+              <a:t>Module 4 (membre4.py): Analyses avancées</a:t>
+            </a:r>
+          </a:p>
+          <a:p>
+            <a:pPr>
+              <a:lnSpc>
+                <a:spcPct val="115000"/>
+              </a:lnSpc>
+              <a:spcBef>
+                <a:spcPts val="400"/>
+              </a:spcBef>
+              <a:spcAft>
+                <a:spcPts val="400"/>
+              </a:spcAft>
+              <a:defRPr sz="1800">
+                <a:solidFill>
+                  <a:srgbClr val="000000"/>
+                </a:solidFill>
+              </a:defRPr>
+            </a:pPr>
+            <a:r>
+              <a:t>Module 5 (main.py): Interface utilisateur et intégration</a:t>
             </a:r>
           </a:p>
         </p:txBody>
@@ -4991,7 +7079,7 @@
         </p:nvSpPr>
         <p:spPr>
           <a:xfrm>
-            <a:off x="457200" y="457200"/>
+            <a:off x="457200" y="365760"/>
             <a:ext cx="8229600" cy="731520"/>
           </a:xfrm>
           <a:prstGeom prst="rect">
@@ -5013,7 +7101,7 @@
               </a:defRPr>
             </a:pPr>
             <a:r>
-              <a:t>Architecture du Projet - Membre 2</a:t>
+              <a:t>Module 1 : Gestion des Producteurs (membre1.py)</a:t>
             </a:r>
           </a:p>
         </p:txBody>
@@ -5026,8 +7114,8 @@
         </p:nvSpPr>
         <p:spPr>
           <a:xfrm>
-            <a:off x="914400" y="1371600"/>
-            <a:ext cx="7315200" cy="5029200"/>
+            <a:off x="640080" y="1280160"/>
+            <a:ext cx="7863840" cy="5212080"/>
           </a:xfrm>
           <a:prstGeom prst="rect">
             <a:avLst/>
@@ -5041,92 +7129,146 @@
           <a:lstStyle/>
           <a:p>
             <a:pPr>
-              <a:spcBef>
-                <a:spcPts val="800"/>
-              </a:spcBef>
-              <a:spcAft>
-                <a:spcPts val="800"/>
-              </a:spcAft>
-              <a:defRPr sz="2000">
-                <a:solidFill>
-                  <a:srgbClr val="000000"/>
-                </a:solidFill>
-              </a:defRPr>
-            </a:pPr>
-            <a:r>
-              <a:t>📁 membre2.py : Gestion des Récoltes</a:t>
-            </a:r>
-          </a:p>
-          <a:p>
-            <a:pPr>
-              <a:spcBef>
-                <a:spcPts val="800"/>
-              </a:spcBef>
-              <a:spcAft>
-                <a:spcPts val="800"/>
-              </a:spcAft>
-              <a:defRPr sz="2000">
-                <a:solidFill>
-                  <a:srgbClr val="000000"/>
-                </a:solidFill>
-              </a:defRPr>
-            </a:pPr>
-            <a:r>
-              <a:t>   • PRODUITS_VALIDES - liste des produits autorisés</a:t>
-            </a:r>
-          </a:p>
-          <a:p>
-            <a:pPr>
-              <a:spcBef>
-                <a:spcPts val="800"/>
-              </a:spcBef>
-              <a:spcAft>
-                <a:spcPts val="800"/>
-              </a:spcAft>
-              <a:defRPr sz="2000">
-                <a:solidFill>
-                  <a:srgbClr val="000000"/>
-                </a:solidFill>
-              </a:defRPr>
-            </a:pPr>
-            <a:r>
-              <a:t>   • produit_valide(produit) - valide un produit</a:t>
-            </a:r>
-          </a:p>
-          <a:p>
-            <a:pPr>
-              <a:spcBef>
-                <a:spcPts val="800"/>
-              </a:spcBef>
-              <a:spcAft>
-                <a:spcPts val="800"/>
-              </a:spcAft>
-              <a:defRPr sz="2000">
-                <a:solidFill>
-                  <a:srgbClr val="000000"/>
-                </a:solidFill>
-              </a:defRPr>
-            </a:pPr>
-            <a:r>
-              <a:t>   • enregistrer_recolte() - enregistre une récolte</a:t>
-            </a:r>
-          </a:p>
-          <a:p>
-            <a:pPr>
-              <a:spcBef>
-                <a:spcPts val="800"/>
-              </a:spcBef>
-              <a:spcAft>
-                <a:spcPts val="800"/>
-              </a:spcAft>
-              <a:defRPr sz="2000">
-                <a:solidFill>
-                  <a:srgbClr val="000000"/>
-                </a:solidFill>
-              </a:defRPr>
-            </a:pPr>
-            <a:r>
-              <a:t>   • afficher_recoltes(nom) - affiche les récoltes</a:t>
+              <a:lnSpc>
+                <a:spcPct val="115000"/>
+              </a:lnSpc>
+              <a:spcBef>
+                <a:spcPts val="400"/>
+              </a:spcBef>
+              <a:spcAft>
+                <a:spcPts val="400"/>
+              </a:spcAft>
+              <a:defRPr sz="1800">
+                <a:solidFill>
+                  <a:srgbClr val="000000"/>
+                </a:solidFill>
+              </a:defRPr>
+            </a:pPr>
+            <a:r>
+              <a:t>Ce module gère l'ajout et le suivi des producteurs de la coopérative.</a:t>
+            </a:r>
+          </a:p>
+          <a:p>
+            <a:pPr>
+              <a:lnSpc>
+                <a:spcPct val="115000"/>
+              </a:lnSpc>
+              <a:spcBef>
+                <a:spcPts val="400"/>
+              </a:spcBef>
+              <a:spcAft>
+                <a:spcPts val="400"/>
+              </a:spcAft>
+              <a:defRPr sz="1800">
+                <a:solidFill>
+                  <a:srgbClr val="000000"/>
+                </a:solidFill>
+              </a:defRPr>
+            </a:pPr>
+          </a:p>
+          <a:p>
+            <a:pPr>
+              <a:lnSpc>
+                <a:spcPct val="115000"/>
+              </a:lnSpc>
+              <a:spcBef>
+                <a:spcPts val="400"/>
+              </a:spcBef>
+              <a:spcAft>
+                <a:spcPts val="400"/>
+              </a:spcAft>
+              <a:defRPr sz="1800">
+                <a:solidFill>
+                  <a:srgbClr val="000000"/>
+                </a:solidFill>
+              </a:defRPr>
+            </a:pPr>
+            <a:r>
+              <a:t>Composants principaux :</a:t>
+            </a:r>
+          </a:p>
+          <a:p>
+            <a:pPr>
+              <a:lnSpc>
+                <a:spcPct val="115000"/>
+              </a:lnSpc>
+              <a:spcBef>
+                <a:spcPts val="400"/>
+              </a:spcBef>
+              <a:spcAft>
+                <a:spcPts val="400"/>
+              </a:spcAft>
+              <a:defRPr sz="1800">
+                <a:solidFill>
+                  <a:srgbClr val="000000"/>
+                </a:solidFill>
+              </a:defRPr>
+            </a:pPr>
+            <a:r>
+              <a:t>- producteurs : liste globale stockant tous les producteurs enregistrés</a:t>
+            </a:r>
+          </a:p>
+          <a:p>
+            <a:pPr>
+              <a:lnSpc>
+                <a:spcPct val="115000"/>
+              </a:lnSpc>
+              <a:spcBef>
+                <a:spcPts val="400"/>
+              </a:spcBef>
+              <a:spcAft>
+                <a:spcPts val="400"/>
+              </a:spcAft>
+              <a:defRPr sz="1800">
+                <a:solidFill>
+                  <a:srgbClr val="000000"/>
+                </a:solidFill>
+              </a:defRPr>
+            </a:pPr>
+            <a:r>
+              <a:t>- ajouter_producteur() : permet d'ajouter un nouveau producteur avec validation</a:t>
+            </a:r>
+          </a:p>
+          <a:p>
+            <a:pPr>
+              <a:lnSpc>
+                <a:spcPct val="115000"/>
+              </a:lnSpc>
+              <a:spcBef>
+                <a:spcPts val="400"/>
+              </a:spcBef>
+              <a:spcAft>
+                <a:spcPts val="400"/>
+              </a:spcAft>
+              <a:defRPr sz="1800">
+                <a:solidFill>
+                  <a:srgbClr val="000000"/>
+                </a:solidFill>
+              </a:defRPr>
+            </a:pPr>
+            <a:r>
+              <a:t>- afficher_producteurs() : affiche la liste complète avec nombre de récoltes</a:t>
+            </a:r>
+          </a:p>
+          <a:p>
+            <a:pPr>
+              <a:lnSpc>
+                <a:spcPct val="115000"/>
+              </a:lnSpc>
+              <a:spcBef>
+                <a:spcPts val="400"/>
+              </a:spcBef>
+              <a:spcAft>
+                <a:spcPts val="400"/>
+              </a:spcAft>
+              <a:defRPr sz="1800">
+                <a:solidFill>
+                  <a:srgbClr val="000000"/>
+                </a:solidFill>
+              </a:defRPr>
+            </a:pPr>
+            <a:r>
+              <a:t>- rechercher_producteur(nom) : trouve un producteur par son nom</a:t>
             </a:r>
           </a:p>
         </p:txBody>
@@ -5165,7 +7307,7 @@
         </p:nvSpPr>
         <p:spPr>
           <a:xfrm>
-            <a:off x="457200" y="457200"/>
+            <a:off x="457200" y="365760"/>
             <a:ext cx="8229600" cy="731520"/>
           </a:xfrm>
           <a:prstGeom prst="rect">
@@ -5187,7 +7329,7 @@
               </a:defRPr>
             </a:pPr>
             <a:r>
-              <a:t>Architecture du Projet - Membre 3</a:t>
+              <a:t>Module 2 : Gestion des Récoltes (membre2.py)</a:t>
             </a:r>
           </a:p>
         </p:txBody>
@@ -5200,8 +7342,8 @@
         </p:nvSpPr>
         <p:spPr>
           <a:xfrm>
-            <a:off x="914400" y="1371600"/>
-            <a:ext cx="7315200" cy="5029200"/>
+            <a:off x="640080" y="1280160"/>
+            <a:ext cx="7863840" cy="5212080"/>
           </a:xfrm>
           <a:prstGeom prst="rect">
             <a:avLst/>
@@ -5215,92 +7357,146 @@
           <a:lstStyle/>
           <a:p>
             <a:pPr>
-              <a:spcBef>
-                <a:spcPts val="800"/>
-              </a:spcBef>
-              <a:spcAft>
-                <a:spcPts val="800"/>
-              </a:spcAft>
-              <a:defRPr sz="2000">
-                <a:solidFill>
-                  <a:srgbClr val="000000"/>
-                </a:solidFill>
-              </a:defRPr>
-            </a:pPr>
-            <a:r>
-              <a:t>📁 Membre3.py : Statistiques de Production</a:t>
-            </a:r>
-          </a:p>
-          <a:p>
-            <a:pPr>
-              <a:spcBef>
-                <a:spcPts val="800"/>
-              </a:spcBef>
-              <a:spcAft>
-                <a:spcPts val="800"/>
-              </a:spcAft>
-              <a:defRPr sz="2000">
-                <a:solidFill>
-                  <a:srgbClr val="000000"/>
-                </a:solidFill>
-              </a:defRPr>
-            </a:pPr>
-            <a:r>
-              <a:t>   • production_totale() - calcule la production totale</a:t>
-            </a:r>
-          </a:p>
-          <a:p>
-            <a:pPr>
-              <a:spcBef>
-                <a:spcPts val="800"/>
-              </a:spcBef>
-              <a:spcAft>
-                <a:spcPts val="800"/>
-              </a:spcAft>
-              <a:defRPr sz="2000">
-                <a:solidFill>
-                  <a:srgbClr val="000000"/>
-                </a:solidFill>
-              </a:defRPr>
-            </a:pPr>
-            <a:r>
-              <a:t>   • production_par_produit() - détail par type de produit</a:t>
-            </a:r>
-          </a:p>
-          <a:p>
-            <a:pPr>
-              <a:spcBef>
-                <a:spcPts val="800"/>
-              </a:spcBef>
-              <a:spcAft>
-                <a:spcPts val="800"/>
-              </a:spcAft>
-              <a:defRPr sz="2000">
-                <a:solidFill>
-                  <a:srgbClr val="000000"/>
-                </a:solidFill>
-              </a:defRPr>
-            </a:pPr>
-            <a:r>
-              <a:t>   • Utilise les données de tous les producteurs</a:t>
-            </a:r>
-          </a:p>
-          <a:p>
-            <a:pPr>
-              <a:spcBef>
-                <a:spcPts val="800"/>
-              </a:spcBef>
-              <a:spcAft>
-                <a:spcPts val="800"/>
-              </a:spcAft>
-              <a:defRPr sz="2000">
-                <a:solidFill>
-                  <a:srgbClr val="000000"/>
-                </a:solidFill>
-              </a:defRPr>
-            </a:pPr>
-            <a:r>
-              <a:t>   • Affiche les résultats en kg</a:t>
+              <a:lnSpc>
+                <a:spcPct val="115000"/>
+              </a:lnSpc>
+              <a:spcBef>
+                <a:spcPts val="400"/>
+              </a:spcBef>
+              <a:spcAft>
+                <a:spcPts val="400"/>
+              </a:spcAft>
+              <a:defRPr sz="1800">
+                <a:solidFill>
+                  <a:srgbClr val="000000"/>
+                </a:solidFill>
+              </a:defRPr>
+            </a:pPr>
+            <a:r>
+              <a:t>Ce module gère l'enregistrement et l'affichage des récoltes des producteurs.</a:t>
+            </a:r>
+          </a:p>
+          <a:p>
+            <a:pPr>
+              <a:lnSpc>
+                <a:spcPct val="115000"/>
+              </a:lnSpc>
+              <a:spcBef>
+                <a:spcPts val="400"/>
+              </a:spcBef>
+              <a:spcAft>
+                <a:spcPts val="400"/>
+              </a:spcAft>
+              <a:defRPr sz="1800">
+                <a:solidFill>
+                  <a:srgbClr val="000000"/>
+                </a:solidFill>
+              </a:defRPr>
+            </a:pPr>
+          </a:p>
+          <a:p>
+            <a:pPr>
+              <a:lnSpc>
+                <a:spcPct val="115000"/>
+              </a:lnSpc>
+              <a:spcBef>
+                <a:spcPts val="400"/>
+              </a:spcBef>
+              <a:spcAft>
+                <a:spcPts val="400"/>
+              </a:spcAft>
+              <a:defRPr sz="1800">
+                <a:solidFill>
+                  <a:srgbClr val="000000"/>
+                </a:solidFill>
+              </a:defRPr>
+            </a:pPr>
+            <a:r>
+              <a:t>Composants principaux :</a:t>
+            </a:r>
+          </a:p>
+          <a:p>
+            <a:pPr>
+              <a:lnSpc>
+                <a:spcPct val="115000"/>
+              </a:lnSpc>
+              <a:spcBef>
+                <a:spcPts val="400"/>
+              </a:spcBef>
+              <a:spcAft>
+                <a:spcPts val="400"/>
+              </a:spcAft>
+              <a:defRPr sz="1800">
+                <a:solidFill>
+                  <a:srgbClr val="000000"/>
+                </a:solidFill>
+              </a:defRPr>
+            </a:pPr>
+            <a:r>
+              <a:t>- PRODUITS_VALIDES : liste des 4 produits autorisés (Mil, Maïs, Riz, Arachide)</a:t>
+            </a:r>
+          </a:p>
+          <a:p>
+            <a:pPr>
+              <a:lnSpc>
+                <a:spcPct val="115000"/>
+              </a:lnSpc>
+              <a:spcBef>
+                <a:spcPts val="400"/>
+              </a:spcBef>
+              <a:spcAft>
+                <a:spcPts val="400"/>
+              </a:spcAft>
+              <a:defRPr sz="1800">
+                <a:solidFill>
+                  <a:srgbClr val="000000"/>
+                </a:solidFill>
+              </a:defRPr>
+            </a:pPr>
+            <a:r>
+              <a:t>- produit_valide(produit) : valide que le produit fait partie de la liste</a:t>
+            </a:r>
+          </a:p>
+          <a:p>
+            <a:pPr>
+              <a:lnSpc>
+                <a:spcPct val="115000"/>
+              </a:lnSpc>
+              <a:spcBef>
+                <a:spcPts val="400"/>
+              </a:spcBef>
+              <a:spcAft>
+                <a:spcPts val="400"/>
+              </a:spcAft>
+              <a:defRPr sz="1800">
+                <a:solidFill>
+                  <a:srgbClr val="000000"/>
+                </a:solidFill>
+              </a:defRPr>
+            </a:pPr>
+            <a:r>
+              <a:t>- enregistrer_recolte() : enregistre une nouvelle récolte avec validation complète</a:t>
+            </a:r>
+          </a:p>
+          <a:p>
+            <a:pPr>
+              <a:lnSpc>
+                <a:spcPct val="115000"/>
+              </a:lnSpc>
+              <a:spcBef>
+                <a:spcPts val="400"/>
+              </a:spcBef>
+              <a:spcAft>
+                <a:spcPts val="400"/>
+              </a:spcAft>
+              <a:defRPr sz="1800">
+                <a:solidFill>
+                  <a:srgbClr val="000000"/>
+                </a:solidFill>
+              </a:defRPr>
+            </a:pPr>
+            <a:r>
+              <a:t>- afficher_recoltes(nom) : affiche toutes les récoltes ou celles d'un producteur</a:t>
             </a:r>
           </a:p>
         </p:txBody>
@@ -5339,7 +7535,7 @@
         </p:nvSpPr>
         <p:spPr>
           <a:xfrm>
-            <a:off x="457200" y="457200"/>
+            <a:off x="457200" y="365760"/>
             <a:ext cx="8229600" cy="731520"/>
           </a:xfrm>
           <a:prstGeom prst="rect">
@@ -5361,7 +7557,7 @@
               </a:defRPr>
             </a:pPr>
             <a:r>
-              <a:t>Architecture du Projet - Membre 4</a:t>
+              <a:t>Module 3 : Statistiques de Production (Membre3.py)</a:t>
             </a:r>
           </a:p>
         </p:txBody>
@@ -5374,8 +7570,8 @@
         </p:nvSpPr>
         <p:spPr>
           <a:xfrm>
-            <a:off x="914400" y="1371600"/>
-            <a:ext cx="7315200" cy="5029200"/>
+            <a:off x="640080" y="1280160"/>
+            <a:ext cx="7863840" cy="5212080"/>
           </a:xfrm>
           <a:prstGeom prst="rect">
             <a:avLst/>
@@ -5389,92 +7585,146 @@
           <a:lstStyle/>
           <a:p>
             <a:pPr>
-              <a:spcBef>
-                <a:spcPts val="800"/>
-              </a:spcBef>
-              <a:spcAft>
-                <a:spcPts val="800"/>
-              </a:spcAft>
-              <a:defRPr sz="2000">
-                <a:solidFill>
-                  <a:srgbClr val="000000"/>
-                </a:solidFill>
-              </a:defRPr>
-            </a:pPr>
-            <a:r>
-              <a:t>📁 membre4.py : Analyses Avancées</a:t>
-            </a:r>
-          </a:p>
-          <a:p>
-            <a:pPr>
-              <a:spcBef>
-                <a:spcPts val="800"/>
-              </a:spcBef>
-              <a:spcAft>
-                <a:spcPts val="800"/>
-              </a:spcAft>
-              <a:defRPr sz="2000">
-                <a:solidFill>
-                  <a:srgbClr val="000000"/>
-                </a:solidFill>
-              </a:defRPr>
-            </a:pPr>
-            <a:r>
-              <a:t>   • meilleur_producteur(liste) - identifie le meilleur</a:t>
-            </a:r>
-          </a:p>
-          <a:p>
-            <a:pPr>
-              <a:spcBef>
-                <a:spcPts val="800"/>
-              </a:spcBef>
-              <a:spcAft>
-                <a:spcPts val="800"/>
-              </a:spcAft>
-              <a:defRPr sz="2000">
-                <a:solidFill>
-                  <a:srgbClr val="000000"/>
-                </a:solidFill>
-              </a:defRPr>
-            </a:pPr>
-            <a:r>
-              <a:t>   • moyenne_producteur(liste) - calcule la moyenne</a:t>
-            </a:r>
-          </a:p>
-          <a:p>
-            <a:pPr>
-              <a:spcBef>
-                <a:spcPts val="800"/>
-              </a:spcBef>
-              <a:spcAft>
-                <a:spcPts val="800"/>
-              </a:spcAft>
-              <a:defRPr sz="2000">
-                <a:solidFill>
-                  <a:srgbClr val="000000"/>
-                </a:solidFill>
-              </a:defRPr>
-            </a:pPr>
-            <a:r>
-              <a:t>   • Utilise pour les statistiques globales</a:t>
-            </a:r>
-          </a:p>
-          <a:p>
-            <a:pPr>
-              <a:spcBef>
-                <a:spcPts val="800"/>
-              </a:spcBef>
-              <a:spcAft>
-                <a:spcPts val="800"/>
-              </a:spcAft>
-              <a:defRPr sz="2000">
-                <a:solidFill>
-                  <a:srgbClr val="000000"/>
-                </a:solidFill>
-              </a:defRPr>
-            </a:pPr>
-            <a:r>
-              <a:t>   • Affiche les résultats formatés</a:t>
+              <a:lnSpc>
+                <a:spcPct val="115000"/>
+              </a:lnSpc>
+              <a:spcBef>
+                <a:spcPts val="400"/>
+              </a:spcBef>
+              <a:spcAft>
+                <a:spcPts val="400"/>
+              </a:spcAft>
+              <a:defRPr sz="1800">
+                <a:solidFill>
+                  <a:srgbClr val="000000"/>
+                </a:solidFill>
+              </a:defRPr>
+            </a:pPr>
+            <a:r>
+              <a:t>Ce module calcule les statistiques globales de production de la coopérative.</a:t>
+            </a:r>
+          </a:p>
+          <a:p>
+            <a:pPr>
+              <a:lnSpc>
+                <a:spcPct val="115000"/>
+              </a:lnSpc>
+              <a:spcBef>
+                <a:spcPts val="400"/>
+              </a:spcBef>
+              <a:spcAft>
+                <a:spcPts val="400"/>
+              </a:spcAft>
+              <a:defRPr sz="1800">
+                <a:solidFill>
+                  <a:srgbClr val="000000"/>
+                </a:solidFill>
+              </a:defRPr>
+            </a:pPr>
+          </a:p>
+          <a:p>
+            <a:pPr>
+              <a:lnSpc>
+                <a:spcPct val="115000"/>
+              </a:lnSpc>
+              <a:spcBef>
+                <a:spcPts val="400"/>
+              </a:spcBef>
+              <a:spcAft>
+                <a:spcPts val="400"/>
+              </a:spcAft>
+              <a:defRPr sz="1800">
+                <a:solidFill>
+                  <a:srgbClr val="000000"/>
+                </a:solidFill>
+              </a:defRPr>
+            </a:pPr>
+            <a:r>
+              <a:t>Composants principaux :</a:t>
+            </a:r>
+          </a:p>
+          <a:p>
+            <a:pPr>
+              <a:lnSpc>
+                <a:spcPct val="115000"/>
+              </a:lnSpc>
+              <a:spcBef>
+                <a:spcPts val="400"/>
+              </a:spcBef>
+              <a:spcAft>
+                <a:spcPts val="400"/>
+              </a:spcAft>
+              <a:defRPr sz="1800">
+                <a:solidFill>
+                  <a:srgbClr val="000000"/>
+                </a:solidFill>
+              </a:defRPr>
+            </a:pPr>
+            <a:r>
+              <a:t>- production_totale() : calcule la quantité totale produite en kg par</a:t>
+            </a:r>
+          </a:p>
+          <a:p>
+            <a:pPr>
+              <a:lnSpc>
+                <a:spcPct val="115000"/>
+              </a:lnSpc>
+              <a:spcBef>
+                <a:spcPts val="400"/>
+              </a:spcBef>
+              <a:spcAft>
+                <a:spcPts val="400"/>
+              </a:spcAft>
+              <a:defRPr sz="1800">
+                <a:solidFill>
+                  <a:srgbClr val="000000"/>
+                </a:solidFill>
+              </a:defRPr>
+            </a:pPr>
+            <a:r>
+              <a:t>  tous les producteurs</a:t>
+            </a:r>
+          </a:p>
+          <a:p>
+            <a:pPr>
+              <a:lnSpc>
+                <a:spcPct val="115000"/>
+              </a:lnSpc>
+              <a:spcBef>
+                <a:spcPts val="400"/>
+              </a:spcBef>
+              <a:spcAft>
+                <a:spcPts val="400"/>
+              </a:spcAft>
+              <a:defRPr sz="1800">
+                <a:solidFill>
+                  <a:srgbClr val="000000"/>
+                </a:solidFill>
+              </a:defRPr>
+            </a:pPr>
+            <a:r>
+              <a:t>- production_par_produit() : décompose la production par type de produit</a:t>
+            </a:r>
+          </a:p>
+          <a:p>
+            <a:pPr>
+              <a:lnSpc>
+                <a:spcPct val="115000"/>
+              </a:lnSpc>
+              <a:spcBef>
+                <a:spcPts val="400"/>
+              </a:spcBef>
+              <a:spcAft>
+                <a:spcPts val="400"/>
+              </a:spcAft>
+              <a:defRPr sz="1800">
+                <a:solidFill>
+                  <a:srgbClr val="000000"/>
+                </a:solidFill>
+              </a:defRPr>
+            </a:pPr>
+            <a:r>
+              <a:t>  et affiche les totaux pour chaque catégorie</a:t>
             </a:r>
           </a:p>
         </p:txBody>
@@ -5513,7 +7763,7 @@
         </p:nvSpPr>
         <p:spPr>
           <a:xfrm>
-            <a:off x="457200" y="457200"/>
+            <a:off x="457200" y="365760"/>
             <a:ext cx="8229600" cy="731520"/>
           </a:xfrm>
           <a:prstGeom prst="rect">
@@ -5535,7 +7785,7 @@
               </a:defRPr>
             </a:pPr>
             <a:r>
-              <a:t>Architecture du Projet - Membre 5</a:t>
+              <a:t>Module 4 : Analyses Avancées (membre4.py)</a:t>
             </a:r>
           </a:p>
         </p:txBody>
@@ -5548,8 +7798,8 @@
         </p:nvSpPr>
         <p:spPr>
           <a:xfrm>
-            <a:off x="914400" y="1371600"/>
-            <a:ext cx="7315200" cy="5029200"/>
+            <a:off x="640080" y="1280160"/>
+            <a:ext cx="7863840" cy="5212080"/>
           </a:xfrm>
           <a:prstGeom prst="rect">
             <a:avLst/>
@@ -5563,92 +7813,146 @@
           <a:lstStyle/>
           <a:p>
             <a:pPr>
-              <a:spcBef>
-                <a:spcPts val="800"/>
-              </a:spcBef>
-              <a:spcAft>
-                <a:spcPts val="800"/>
-              </a:spcAft>
-              <a:defRPr sz="2000">
-                <a:solidFill>
-                  <a:srgbClr val="000000"/>
-                </a:solidFill>
-              </a:defRPr>
-            </a:pPr>
-            <a:r>
-              <a:t>📁 main.py : Menu Principal et Intégration</a:t>
-            </a:r>
-          </a:p>
-          <a:p>
-            <a:pPr>
-              <a:spcBef>
-                <a:spcPts val="800"/>
-              </a:spcBef>
-              <a:spcAft>
-                <a:spcPts val="800"/>
-              </a:spcAft>
-              <a:defRPr sz="2000">
-                <a:solidFill>
-                  <a:srgbClr val="000000"/>
-                </a:solidFill>
-              </a:defRPr>
-            </a:pPr>
-            <a:r>
-              <a:t>   • Importe toutes les fonctions des 4 membres</a:t>
-            </a:r>
-          </a:p>
-          <a:p>
-            <a:pPr>
-              <a:spcBef>
-                <a:spcPts val="800"/>
-              </a:spcBef>
-              <a:spcAft>
-                <a:spcPts val="800"/>
-              </a:spcAft>
-              <a:defRPr sz="2000">
-                <a:solidFill>
-                  <a:srgbClr val="000000"/>
-                </a:solidFill>
-              </a:defRPr>
-            </a:pPr>
-            <a:r>
-              <a:t>   • Menu interactif avec 10 options</a:t>
-            </a:r>
-          </a:p>
-          <a:p>
-            <a:pPr>
-              <a:spcBef>
-                <a:spcPts val="800"/>
-              </a:spcBef>
-              <a:spcAft>
-                <a:spcPts val="800"/>
-              </a:spcAft>
-              <a:defRPr sz="2000">
-                <a:solidFill>
-                  <a:srgbClr val="000000"/>
-                </a:solidFill>
-              </a:defRPr>
-            </a:pPr>
-            <a:r>
-              <a:t>   • Point d'entrée du programme</a:t>
-            </a:r>
-          </a:p>
-          <a:p>
-            <a:pPr>
-              <a:spcBef>
-                <a:spcPts val="800"/>
-              </a:spcBef>
-              <a:spcAft>
-                <a:spcPts val="800"/>
-              </a:spcAft>
-              <a:defRPr sz="2000">
-                <a:solidFill>
-                  <a:srgbClr val="000000"/>
-                </a:solidFill>
-              </a:defRPr>
-            </a:pPr>
-            <a:r>
-              <a:t>   • Permet à l'utilisateur d'accéder à toutes les fonctionnalités</a:t>
+              <a:lnSpc>
+                <a:spcPct val="115000"/>
+              </a:lnSpc>
+              <a:spcBef>
+                <a:spcPts val="400"/>
+              </a:spcBef>
+              <a:spcAft>
+                <a:spcPts val="400"/>
+              </a:spcAft>
+              <a:defRPr sz="1800">
+                <a:solidFill>
+                  <a:srgbClr val="000000"/>
+                </a:solidFill>
+              </a:defRPr>
+            </a:pPr>
+            <a:r>
+              <a:t>Ce module fournit des analyses détaillées des performances des producteurs.</a:t>
+            </a:r>
+          </a:p>
+          <a:p>
+            <a:pPr>
+              <a:lnSpc>
+                <a:spcPct val="115000"/>
+              </a:lnSpc>
+              <a:spcBef>
+                <a:spcPts val="400"/>
+              </a:spcBef>
+              <a:spcAft>
+                <a:spcPts val="400"/>
+              </a:spcAft>
+              <a:defRPr sz="1800">
+                <a:solidFill>
+                  <a:srgbClr val="000000"/>
+                </a:solidFill>
+              </a:defRPr>
+            </a:pPr>
+          </a:p>
+          <a:p>
+            <a:pPr>
+              <a:lnSpc>
+                <a:spcPct val="115000"/>
+              </a:lnSpc>
+              <a:spcBef>
+                <a:spcPts val="400"/>
+              </a:spcBef>
+              <a:spcAft>
+                <a:spcPts val="400"/>
+              </a:spcAft>
+              <a:defRPr sz="1800">
+                <a:solidFill>
+                  <a:srgbClr val="000000"/>
+                </a:solidFill>
+              </a:defRPr>
+            </a:pPr>
+            <a:r>
+              <a:t>Composants principaux :</a:t>
+            </a:r>
+          </a:p>
+          <a:p>
+            <a:pPr>
+              <a:lnSpc>
+                <a:spcPct val="115000"/>
+              </a:lnSpc>
+              <a:spcBef>
+                <a:spcPts val="400"/>
+              </a:spcBef>
+              <a:spcAft>
+                <a:spcPts val="400"/>
+              </a:spcAft>
+              <a:defRPr sz="1800">
+                <a:solidFill>
+                  <a:srgbClr val="000000"/>
+                </a:solidFill>
+              </a:defRPr>
+            </a:pPr>
+            <a:r>
+              <a:t>- meilleur_producteur(liste) : identifie et affiche le producteur ayant</a:t>
+            </a:r>
+          </a:p>
+          <a:p>
+            <a:pPr>
+              <a:lnSpc>
+                <a:spcPct val="115000"/>
+              </a:lnSpc>
+              <a:spcBef>
+                <a:spcPts val="400"/>
+              </a:spcBef>
+              <a:spcAft>
+                <a:spcPts val="400"/>
+              </a:spcAft>
+              <a:defRPr sz="1800">
+                <a:solidFill>
+                  <a:srgbClr val="000000"/>
+                </a:solidFill>
+              </a:defRPr>
+            </a:pPr>
+            <a:r>
+              <a:t>  la plus grande quantité totale produite</a:t>
+            </a:r>
+          </a:p>
+          <a:p>
+            <a:pPr>
+              <a:lnSpc>
+                <a:spcPct val="115000"/>
+              </a:lnSpc>
+              <a:spcBef>
+                <a:spcPts val="400"/>
+              </a:spcBef>
+              <a:spcAft>
+                <a:spcPts val="400"/>
+              </a:spcAft>
+              <a:defRPr sz="1800">
+                <a:solidFill>
+                  <a:srgbClr val="000000"/>
+                </a:solidFill>
+              </a:defRPr>
+            </a:pPr>
+            <a:r>
+              <a:t>- moyenne_producteur(liste) : calcule la production moyenne par producteur</a:t>
+            </a:r>
+          </a:p>
+          <a:p>
+            <a:pPr>
+              <a:lnSpc>
+                <a:spcPct val="115000"/>
+              </a:lnSpc>
+              <a:spcBef>
+                <a:spcPts val="400"/>
+              </a:spcBef>
+              <a:spcAft>
+                <a:spcPts val="400"/>
+              </a:spcAft>
+              <a:defRPr sz="1800">
+                <a:solidFill>
+                  <a:srgbClr val="000000"/>
+                </a:solidFill>
+              </a:defRPr>
+            </a:pPr>
+            <a:r>
+              <a:t>  et affiche le résultat formaté avec 2 décimales</a:t>
             </a:r>
           </a:p>
         </p:txBody>
@@ -5687,7 +7991,7 @@
         </p:nvSpPr>
         <p:spPr>
           <a:xfrm>
-            <a:off x="457200" y="457200"/>
+            <a:off x="457200" y="365760"/>
             <a:ext cx="8229600" cy="731520"/>
           </a:xfrm>
           <a:prstGeom prst="rect">
@@ -5709,7 +8013,7 @@
               </a:defRPr>
             </a:pPr>
             <a:r>
-              <a:t>Flux du Programme</a:t>
+              <a:t>Module 5 : Interface Principale (main.py)</a:t>
             </a:r>
           </a:p>
         </p:txBody>
@@ -5722,8 +8026,8 @@
         </p:nvSpPr>
         <p:spPr>
           <a:xfrm>
-            <a:off x="914400" y="1371600"/>
-            <a:ext cx="7315200" cy="5029200"/>
+            <a:off x="640080" y="1280160"/>
+            <a:ext cx="7863840" cy="5212080"/>
           </a:xfrm>
           <a:prstGeom prst="rect">
             <a:avLst/>
@@ -5737,92 +8041,146 @@
           <a:lstStyle/>
           <a:p>
             <a:pPr>
-              <a:spcBef>
-                <a:spcPts val="800"/>
-              </a:spcBef>
-              <a:spcAft>
-                <a:spcPts val="800"/>
-              </a:spcAft>
-              <a:defRPr sz="2000">
-                <a:solidFill>
-                  <a:srgbClr val="000000"/>
-                </a:solidFill>
-              </a:defRPr>
-            </a:pPr>
-            <a:r>
-              <a:t>1️⃣ Lancement : python main.py</a:t>
-            </a:r>
-          </a:p>
-          <a:p>
-            <a:pPr>
-              <a:spcBef>
-                <a:spcPts val="800"/>
-              </a:spcBef>
-              <a:spcAft>
-                <a:spcPts val="800"/>
-              </a:spcAft>
-              <a:defRPr sz="2000">
-                <a:solidFill>
-                  <a:srgbClr val="000000"/>
-                </a:solidFill>
-              </a:defRPr>
-            </a:pPr>
-            <a:r>
-              <a:t>2️⃣ Affichage du menu interactif</a:t>
-            </a:r>
-          </a:p>
-          <a:p>
-            <a:pPr>
-              <a:spcBef>
-                <a:spcPts val="800"/>
-              </a:spcBef>
-              <a:spcAft>
-                <a:spcPts val="800"/>
-              </a:spcAft>
-              <a:defRPr sz="2000">
-                <a:solidFill>
-                  <a:srgbClr val="000000"/>
-                </a:solidFill>
-              </a:defRPr>
-            </a:pPr>
-            <a:r>
-              <a:t>3️⃣ L'utilisateur choisit une option (1-10)</a:t>
-            </a:r>
-          </a:p>
-          <a:p>
-            <a:pPr>
-              <a:spcBef>
-                <a:spcPts val="800"/>
-              </a:spcBef>
-              <a:spcAft>
-                <a:spcPts val="800"/>
-              </a:spcAft>
-              <a:defRPr sz="2000">
-                <a:solidFill>
-                  <a:srgbClr val="000000"/>
-                </a:solidFill>
-              </a:defRPr>
-            </a:pPr>
-            <a:r>
-              <a:t>4️⃣ Exécution de la fonction correspondante</a:t>
-            </a:r>
-          </a:p>
-          <a:p>
-            <a:pPr>
-              <a:spcBef>
-                <a:spcPts val="800"/>
-              </a:spcBef>
-              <a:spcAft>
-                <a:spcPts val="800"/>
-              </a:spcAft>
-              <a:defRPr sz="2000">
-                <a:solidFill>
-                  <a:srgbClr val="000000"/>
-                </a:solidFill>
-              </a:defRPr>
-            </a:pPr>
-            <a:r>
-              <a:t>5️⃣ Retour au menu pour une autre action</a:t>
+              <a:lnSpc>
+                <a:spcPct val="115000"/>
+              </a:lnSpc>
+              <a:spcBef>
+                <a:spcPts val="400"/>
+              </a:spcBef>
+              <a:spcAft>
+                <a:spcPts val="400"/>
+              </a:spcAft>
+              <a:defRPr sz="1800">
+                <a:solidFill>
+                  <a:srgbClr val="000000"/>
+                </a:solidFill>
+              </a:defRPr>
+            </a:pPr>
+            <a:r>
+              <a:t>Ce module fournit l'interface utilisateur et intègre tous les autres modules.</a:t>
+            </a:r>
+          </a:p>
+          <a:p>
+            <a:pPr>
+              <a:lnSpc>
+                <a:spcPct val="115000"/>
+              </a:lnSpc>
+              <a:spcBef>
+                <a:spcPts val="400"/>
+              </a:spcBef>
+              <a:spcAft>
+                <a:spcPts val="400"/>
+              </a:spcAft>
+              <a:defRPr sz="1800">
+                <a:solidFill>
+                  <a:srgbClr val="000000"/>
+                </a:solidFill>
+              </a:defRPr>
+            </a:pPr>
+          </a:p>
+          <a:p>
+            <a:pPr>
+              <a:lnSpc>
+                <a:spcPct val="115000"/>
+              </a:lnSpc>
+              <a:spcBef>
+                <a:spcPts val="400"/>
+              </a:spcBef>
+              <a:spcAft>
+                <a:spcPts val="400"/>
+              </a:spcAft>
+              <a:defRPr sz="1800">
+                <a:solidFill>
+                  <a:srgbClr val="000000"/>
+                </a:solidFill>
+              </a:defRPr>
+            </a:pPr>
+            <a:r>
+              <a:t>Fonctionnalités :</a:t>
+            </a:r>
+          </a:p>
+          <a:p>
+            <a:pPr>
+              <a:lnSpc>
+                <a:spcPct val="115000"/>
+              </a:lnSpc>
+              <a:spcBef>
+                <a:spcPts val="400"/>
+              </a:spcBef>
+              <a:spcAft>
+                <a:spcPts val="400"/>
+              </a:spcAft>
+              <a:defRPr sz="1800">
+                <a:solidFill>
+                  <a:srgbClr val="000000"/>
+                </a:solidFill>
+              </a:defRPr>
+            </a:pPr>
+            <a:r>
+              <a:t>- Menu interactif affichant 10 options numérotées (1-9, plus 0 pour quitter)</a:t>
+            </a:r>
+          </a:p>
+          <a:p>
+            <a:pPr>
+              <a:lnSpc>
+                <a:spcPct val="115000"/>
+              </a:lnSpc>
+              <a:spcBef>
+                <a:spcPts val="400"/>
+              </a:spcBef>
+              <a:spcAft>
+                <a:spcPts val="400"/>
+              </a:spcAft>
+              <a:defRPr sz="1800">
+                <a:solidFill>
+                  <a:srgbClr val="000000"/>
+                </a:solidFill>
+              </a:defRPr>
+            </a:pPr>
+            <a:r>
+              <a:t>- Importe toutes les fonctions des 4 modules précédents</a:t>
+            </a:r>
+          </a:p>
+          <a:p>
+            <a:pPr>
+              <a:lnSpc>
+                <a:spcPct val="115000"/>
+              </a:lnSpc>
+              <a:spcBef>
+                <a:spcPts val="400"/>
+              </a:spcBef>
+              <a:spcAft>
+                <a:spcPts val="400"/>
+              </a:spcAft>
+              <a:defRPr sz="1800">
+                <a:solidFill>
+                  <a:srgbClr val="000000"/>
+                </a:solidFill>
+              </a:defRPr>
+            </a:pPr>
+            <a:r>
+              <a:t>- Boucle infinie permettant à l'utilisateur de naviguer entre les options</a:t>
+            </a:r>
+          </a:p>
+          <a:p>
+            <a:pPr>
+              <a:lnSpc>
+                <a:spcPct val="115000"/>
+              </a:lnSpc>
+              <a:spcBef>
+                <a:spcPts val="400"/>
+              </a:spcBef>
+              <a:spcAft>
+                <a:spcPts val="400"/>
+              </a:spcAft>
+              <a:defRPr sz="1800">
+                <a:solidFill>
+                  <a:srgbClr val="000000"/>
+                </a:solidFill>
+              </a:defRPr>
+            </a:pPr>
+            <a:r>
+              <a:t>- Gère les entrées utilisateur et appelle les fonctions appropriées</a:t>
             </a:r>
           </a:p>
         </p:txBody>
